--- a/00_제출/발표자료/[LocalGuard] JB금융그룹 Fin AI Challenge MVP제안서.pptx
+++ b/00_제출/발표자료/[LocalGuard] JB금융그룹 Fin AI Challenge MVP제안서.pptx
@@ -284,14 +284,14 @@
           </c:tx>
           <c:spPr>
             <a:solidFill>
-              <a:srgbClr val="CC785C"/>
+              <a:srgbClr val="0B6FB3"/>
             </a:solidFill>
           </c:spPr>
           <c:dPt>
             <c:idx val="0"/>
             <c:spPr>
               <a:solidFill>
-                <a:srgbClr val="E8E0D2"/>
+                <a:srgbClr val="CFE6FA"/>
               </a:solidFill>
             </c:spPr>
           </c:dPt>
@@ -333,7 +333,7 @@
               <a:pPr>
                 <a:defRPr sz="850">
                   <a:solidFill>
-                    <a:srgbClr val="141413"/>
+                    <a:srgbClr val="0F1F3A"/>
                   </a:solidFill>
                   <a:latin typeface="Pretendard"/>
                 </a:defRPr>
@@ -365,7 +365,7 @@
         <c:spPr>
           <a:ln>
             <a:solidFill>
-              <a:srgbClr val="E6DFD8"/>
+              <a:srgbClr val="D6E3F1"/>
             </a:solidFill>
           </a:ln>
         </c:spPr>
@@ -397,7 +397,7 @@
       <a:pPr>
         <a:defRPr sz="900">
           <a:solidFill>
-            <a:srgbClr val="6C6A64"/>
+            <a:srgbClr val="637797"/>
           </a:solidFill>
           <a:latin typeface="Pretendard"/>
         </a:defRPr>
@@ -437,7 +437,7 @@
           <c:spPr>
             <a:ln w="28575">
               <a:solidFill>
-                <a:srgbClr val="A9583E"/>
+                <a:srgbClr val="07569D"/>
               </a:solidFill>
             </a:ln>
           </c:spPr>
@@ -492,7 +492,7 @@
               <a:pPr>
                 <a:defRPr sz="800">
                   <a:solidFill>
-                    <a:srgbClr val="141413"/>
+                    <a:srgbClr val="0F1F3A"/>
                   </a:solidFill>
                   <a:latin typeface="Pretendard"/>
                 </a:defRPr>
@@ -525,7 +525,7 @@
         <c:spPr>
           <a:ln>
             <a:solidFill>
-              <a:srgbClr val="E6DFD8"/>
+              <a:srgbClr val="D6E3F1"/>
             </a:solidFill>
           </a:ln>
         </c:spPr>
@@ -559,7 +559,7 @@
       <a:pPr>
         <a:defRPr sz="900">
           <a:solidFill>
-            <a:srgbClr val="6C6A64"/>
+            <a:srgbClr val="637797"/>
           </a:solidFill>
           <a:latin typeface="Pretendard"/>
         </a:defRPr>
@@ -12430,7 +12430,7 @@
                       <a:r>
                         <a:rPr sz="1800" b="1">
                           <a:solidFill>
-                            <a:srgbClr val="141413"/>
+                            <a:srgbClr val="0F1F3A"/>
                           </a:solidFill>
                           <a:latin typeface="Pretendard"/>
                           <a:ea typeface="Pretendard"/>
@@ -12577,7 +12577,7 @@
                       <a:r>
                         <a:rPr sz="1800" b="1">
                           <a:solidFill>
-                            <a:srgbClr val="A9583E"/>
+                            <a:srgbClr val="07569D"/>
                           </a:solidFill>
                           <a:latin typeface="Pretendard"/>
                           <a:ea typeface="Pretendard"/>
@@ -12903,7 +12903,7 @@
             <a:r>
               <a:rPr sz="1400" b="0">
                 <a:solidFill>
-                  <a:srgbClr val="6C6A64"/>
+                  <a:srgbClr val="637797"/>
                 </a:solidFill>
                 <a:latin typeface="Pretendard"/>
                 <a:ea typeface="Pretendard"/>
@@ -13229,7 +13229,7 @@
                       <a:r>
                         <a:rPr sz="1500" b="1">
                           <a:solidFill>
-                            <a:srgbClr val="141413"/>
+                            <a:srgbClr val="0F1F3A"/>
                           </a:solidFill>
                           <a:latin typeface="Pretendard"/>
                           <a:ea typeface="Pretendard"/>
@@ -13345,7 +13345,7 @@
                       <a:r>
                         <a:rPr sz="1500" b="0">
                           <a:solidFill>
-                            <a:srgbClr val="141413"/>
+                            <a:srgbClr val="0F1F3A"/>
                           </a:solidFill>
                           <a:latin typeface="Pretendard"/>
                           <a:ea typeface="Pretendard"/>
@@ -13467,7 +13467,7 @@
                       <a:r>
                         <a:rPr sz="1500" b="1">
                           <a:solidFill>
-                            <a:srgbClr val="141413"/>
+                            <a:srgbClr val="0F1F3A"/>
                           </a:solidFill>
                           <a:latin typeface="Pretendard"/>
                           <a:ea typeface="Pretendard"/>
@@ -13589,7 +13589,7 @@
                       <a:r>
                         <a:rPr sz="1500" b="0">
                           <a:solidFill>
-                            <a:srgbClr val="141413"/>
+                            <a:srgbClr val="0F1F3A"/>
                           </a:solidFill>
                           <a:latin typeface="Pretendard"/>
                           <a:ea typeface="Pretendard"/>
@@ -13722,7 +13722,7 @@
                       <a:r>
                         <a:rPr sz="1400" b="0">
                           <a:solidFill>
-                            <a:srgbClr val="141413"/>
+                            <a:srgbClr val="0F1F3A"/>
                           </a:solidFill>
                           <a:latin typeface="Pretendard"/>
                           <a:ea typeface="Pretendard"/>
@@ -13732,7 +13732,7 @@
                       <a:r>
                         <a:rPr sz="1400" b="1">
                           <a:solidFill>
-                            <a:srgbClr val="A9583E"/>
+                            <a:srgbClr val="07569D"/>
                           </a:solidFill>
                           <a:latin typeface="Pretendard"/>
                           <a:ea typeface="Pretendard"/>
@@ -13742,7 +13742,7 @@
                       <a:r>
                         <a:rPr sz="1400" b="0">
                           <a:solidFill>
-                            <a:srgbClr val="141413"/>
+                            <a:srgbClr val="0F1F3A"/>
                           </a:solidFill>
                           <a:latin typeface="Pretendard"/>
                           <a:ea typeface="Pretendard"/>
@@ -13752,7 +13752,7 @@
                       <a:r>
                         <a:rPr sz="1400" b="1">
                           <a:solidFill>
-                            <a:srgbClr val="A9583E"/>
+                            <a:srgbClr val="07569D"/>
                           </a:solidFill>
                           <a:latin typeface="Pretendard"/>
                           <a:ea typeface="Pretendard"/>
@@ -13762,7 +13762,7 @@
                       <a:r>
                         <a:rPr sz="1400" b="0">
                           <a:solidFill>
-                            <a:srgbClr val="141413"/>
+                            <a:srgbClr val="0F1F3A"/>
                           </a:solidFill>
                           <a:latin typeface="Pretendard"/>
                           <a:ea typeface="Pretendard"/>
@@ -14913,11 +14913,11 @@
             </a:avLst>
           </a:prstGeom>
           <a:solidFill>
-            <a:srgbClr val="EFE9DE"/>
+            <a:srgbClr val="EDF7FF"/>
           </a:solidFill>
           <a:ln w="9525">
             <a:solidFill>
-              <a:srgbClr val="E6DFD8"/>
+              <a:srgbClr val="D6E3F1"/>
             </a:solidFill>
           </a:ln>
           <a:effectLst/>
@@ -14961,7 +14961,7 @@
             </a:avLst>
           </a:prstGeom>
           <a:solidFill>
-            <a:srgbClr val="CC785C"/>
+            <a:srgbClr val="0B6FB3"/>
           </a:solidFill>
           <a:ln>
             <a:noFill/>
@@ -15020,7 +15020,7 @@
             <a:r>
               <a:rPr sz="1800" b="1">
                 <a:solidFill>
-                  <a:srgbClr val="A9583E"/>
+                  <a:srgbClr val="07569D"/>
                 </a:solidFill>
                 <a:latin typeface="Pretendard"/>
                 <a:ea typeface="Pretendard"/>
@@ -15060,7 +15060,7 @@
             <a:r>
               <a:rPr sz="950" b="1">
                 <a:solidFill>
-                  <a:srgbClr val="141413"/>
+                  <a:srgbClr val="0F1F3A"/>
                 </a:solidFill>
                 <a:latin typeface="Pretendard"/>
                 <a:ea typeface="Pretendard"/>
@@ -15100,7 +15100,7 @@
             <a:r>
               <a:rPr sz="750" b="0">
                 <a:solidFill>
-                  <a:srgbClr val="6C6A64"/>
+                  <a:srgbClr val="637797"/>
                 </a:solidFill>
                 <a:latin typeface="Pretendard"/>
                 <a:ea typeface="Pretendard"/>
@@ -15127,11 +15127,11 @@
             </a:avLst>
           </a:prstGeom>
           <a:solidFill>
-            <a:srgbClr val="EFE9DE"/>
+            <a:srgbClr val="EDF7FF"/>
           </a:solidFill>
           <a:ln w="9525">
             <a:solidFill>
-              <a:srgbClr val="E6DFD8"/>
+              <a:srgbClr val="D6E3F1"/>
             </a:solidFill>
           </a:ln>
           <a:effectLst/>
@@ -15175,7 +15175,7 @@
             </a:avLst>
           </a:prstGeom>
           <a:solidFill>
-            <a:srgbClr val="CC785C"/>
+            <a:srgbClr val="0B6FB3"/>
           </a:solidFill>
           <a:ln>
             <a:noFill/>
@@ -15234,7 +15234,7 @@
             <a:r>
               <a:rPr sz="1800" b="1">
                 <a:solidFill>
-                  <a:srgbClr val="A9583E"/>
+                  <a:srgbClr val="07569D"/>
                 </a:solidFill>
                 <a:latin typeface="Pretendard"/>
                 <a:ea typeface="Pretendard"/>
@@ -15274,7 +15274,7 @@
             <a:r>
               <a:rPr sz="950" b="1">
                 <a:solidFill>
-                  <a:srgbClr val="141413"/>
+                  <a:srgbClr val="0F1F3A"/>
                 </a:solidFill>
                 <a:latin typeface="Pretendard"/>
                 <a:ea typeface="Pretendard"/>
@@ -15314,7 +15314,7 @@
             <a:r>
               <a:rPr sz="750" b="0">
                 <a:solidFill>
-                  <a:srgbClr val="6C6A64"/>
+                  <a:srgbClr val="637797"/>
                 </a:solidFill>
                 <a:latin typeface="Pretendard"/>
                 <a:ea typeface="Pretendard"/>
@@ -15341,11 +15341,11 @@
             </a:avLst>
           </a:prstGeom>
           <a:solidFill>
-            <a:srgbClr val="EFE9DE"/>
+            <a:srgbClr val="EDF7FF"/>
           </a:solidFill>
           <a:ln w="9525">
             <a:solidFill>
-              <a:srgbClr val="E6DFD8"/>
+              <a:srgbClr val="D6E3F1"/>
             </a:solidFill>
           </a:ln>
           <a:effectLst/>
@@ -15389,7 +15389,7 @@
             </a:avLst>
           </a:prstGeom>
           <a:solidFill>
-            <a:srgbClr val="CC785C"/>
+            <a:srgbClr val="0B6FB3"/>
           </a:solidFill>
           <a:ln>
             <a:noFill/>
@@ -15448,7 +15448,7 @@
             <a:r>
               <a:rPr sz="1800" b="1">
                 <a:solidFill>
-                  <a:srgbClr val="A9583E"/>
+                  <a:srgbClr val="07569D"/>
                 </a:solidFill>
                 <a:latin typeface="Pretendard"/>
                 <a:ea typeface="Pretendard"/>
@@ -15488,7 +15488,7 @@
             <a:r>
               <a:rPr sz="950" b="1">
                 <a:solidFill>
-                  <a:srgbClr val="141413"/>
+                  <a:srgbClr val="0F1F3A"/>
                 </a:solidFill>
                 <a:latin typeface="Pretendard"/>
                 <a:ea typeface="Pretendard"/>
@@ -15528,7 +15528,7 @@
             <a:r>
               <a:rPr sz="750" b="0">
                 <a:solidFill>
-                  <a:srgbClr val="6C6A64"/>
+                  <a:srgbClr val="637797"/>
                 </a:solidFill>
                 <a:latin typeface="Pretendard"/>
                 <a:ea typeface="Pretendard"/>
@@ -15555,11 +15555,11 @@
             </a:avLst>
           </a:prstGeom>
           <a:solidFill>
-            <a:srgbClr val="FAF9F5"/>
+            <a:srgbClr val="FFFFFF"/>
           </a:solidFill>
           <a:ln w="9525">
             <a:solidFill>
-              <a:srgbClr val="E6DFD8"/>
+              <a:srgbClr val="D6E3F1"/>
             </a:solidFill>
           </a:ln>
           <a:effectLst/>
@@ -15616,7 +15616,7 @@
             <a:r>
               <a:rPr sz="1000" b="1">
                 <a:solidFill>
-                  <a:srgbClr val="141413"/>
+                  <a:srgbClr val="0F1F3A"/>
                 </a:solidFill>
                 <a:latin typeface="Pretendard"/>
                 <a:ea typeface="Pretendard"/>
@@ -15674,7 +15674,7 @@
             <a:r>
               <a:rPr sz="750" b="0">
                 <a:solidFill>
-                  <a:srgbClr val="6C6A64"/>
+                  <a:srgbClr val="637797"/>
                 </a:solidFill>
                 <a:latin typeface="Pretendard"/>
                 <a:ea typeface="Pretendard"/>
@@ -15701,11 +15701,11 @@
             </a:avLst>
           </a:prstGeom>
           <a:solidFill>
-            <a:srgbClr val="FAF9F5"/>
+            <a:srgbClr val="FFFFFF"/>
           </a:solidFill>
           <a:ln w="9525">
             <a:solidFill>
-              <a:srgbClr val="E6DFD8"/>
+              <a:srgbClr val="D6E3F1"/>
             </a:solidFill>
           </a:ln>
           <a:effectLst/>
@@ -15762,7 +15762,7 @@
             <a:r>
               <a:rPr sz="1000" b="1">
                 <a:solidFill>
-                  <a:srgbClr val="141413"/>
+                  <a:srgbClr val="0F1F3A"/>
                 </a:solidFill>
                 <a:latin typeface="Pretendard"/>
                 <a:ea typeface="Pretendard"/>
@@ -15820,7 +15820,7 @@
             <a:r>
               <a:rPr sz="750" b="0">
                 <a:solidFill>
-                  <a:srgbClr val="6C6A64"/>
+                  <a:srgbClr val="637797"/>
                 </a:solidFill>
                 <a:latin typeface="Pretendard"/>
                 <a:ea typeface="Pretendard"/>
@@ -15847,7 +15847,7 @@
             </a:avLst>
           </a:prstGeom>
           <a:solidFill>
-            <a:srgbClr val="181715"/>
+            <a:srgbClr val="091C4D"/>
           </a:solidFill>
           <a:ln>
             <a:noFill/>
@@ -15906,7 +15906,7 @@
             <a:r>
               <a:rPr sz="1000" b="1">
                 <a:solidFill>
-                  <a:srgbClr val="E8A55A"/>
+                  <a:srgbClr val="1CA9D6"/>
                 </a:solidFill>
                 <a:latin typeface="Pretendard"/>
                 <a:ea typeface="Pretendard"/>
@@ -15946,7 +15946,7 @@
             <a:r>
               <a:rPr sz="850" b="0">
                 <a:solidFill>
-                  <a:srgbClr val="A09D96"/>
+                  <a:srgbClr val="9DB1CE"/>
                 </a:solidFill>
                 <a:latin typeface="Pretendard"/>
                 <a:ea typeface="Pretendard"/>
@@ -15963,7 +15963,7 @@
             <a:r>
               <a:rPr sz="850" b="0">
                 <a:solidFill>
-                  <a:srgbClr val="A09D96"/>
+                  <a:srgbClr val="9DB1CE"/>
                 </a:solidFill>
                 <a:latin typeface="Pretendard"/>
                 <a:ea typeface="Pretendard"/>
@@ -16003,7 +16003,7 @@
             <a:r>
               <a:rPr sz="1000" b="1">
                 <a:solidFill>
-                  <a:srgbClr val="E8A55A"/>
+                  <a:srgbClr val="1CA9D6"/>
                 </a:solidFill>
                 <a:latin typeface="Pretendard"/>
                 <a:ea typeface="Pretendard"/>
@@ -16043,7 +16043,7 @@
             <a:r>
               <a:rPr sz="850" b="0">
                 <a:solidFill>
-                  <a:srgbClr val="A09D96"/>
+                  <a:srgbClr val="9DB1CE"/>
                 </a:solidFill>
                 <a:latin typeface="Pretendard"/>
                 <a:ea typeface="Pretendard"/>
@@ -16060,7 +16060,7 @@
             <a:r>
               <a:rPr sz="850" b="0">
                 <a:solidFill>
-                  <a:srgbClr val="A09D96"/>
+                  <a:srgbClr val="9DB1CE"/>
                 </a:solidFill>
                 <a:latin typeface="Pretendard"/>
                 <a:ea typeface="Pretendard"/>
@@ -16100,7 +16100,7 @@
             <a:r>
               <a:rPr sz="1000" b="1">
                 <a:solidFill>
-                  <a:srgbClr val="E8A55A"/>
+                  <a:srgbClr val="1CA9D6"/>
                 </a:solidFill>
                 <a:latin typeface="Pretendard"/>
                 <a:ea typeface="Pretendard"/>
@@ -16140,7 +16140,7 @@
             <a:r>
               <a:rPr sz="850" b="0">
                 <a:solidFill>
-                  <a:srgbClr val="A09D96"/>
+                  <a:srgbClr val="9DB1CE"/>
                 </a:solidFill>
                 <a:latin typeface="Pretendard"/>
                 <a:ea typeface="Pretendard"/>
@@ -16157,7 +16157,7 @@
             <a:r>
               <a:rPr sz="850" b="0">
                 <a:solidFill>
-                  <a:srgbClr val="A09D96"/>
+                  <a:srgbClr val="9DB1CE"/>
                 </a:solidFill>
                 <a:latin typeface="Pretendard"/>
                 <a:ea typeface="Pretendard"/>
@@ -16903,7 +16903,7 @@
             <a:r>
               <a:rPr sz="1100" b="1">
                 <a:solidFill>
-                  <a:srgbClr val="141413"/>
+                  <a:srgbClr val="0F1F3A"/>
                 </a:solidFill>
                 <a:latin typeface="Pretendard"/>
                 <a:ea typeface="Pretendard"/>
@@ -16913,7 +16913,7 @@
             <a:r>
               <a:rPr sz="900" b="0">
                 <a:solidFill>
-                  <a:srgbClr val="6C6A64"/>
+                  <a:srgbClr val="637797"/>
                 </a:solidFill>
                 <a:latin typeface="Pretendard"/>
                 <a:ea typeface="Pretendard"/>
@@ -16940,11 +16940,11 @@
             </a:avLst>
           </a:prstGeom>
           <a:solidFill>
-            <a:srgbClr val="EFE9DE"/>
+            <a:srgbClr val="EDF7FF"/>
           </a:solidFill>
           <a:ln w="9525">
             <a:solidFill>
-              <a:srgbClr val="E6DFD8"/>
+              <a:srgbClr val="D6E3F1"/>
             </a:solidFill>
           </a:ln>
           <a:effectLst/>
@@ -17001,7 +17001,7 @@
             <a:r>
               <a:rPr sz="850" b="1">
                 <a:solidFill>
-                  <a:srgbClr val="141413"/>
+                  <a:srgbClr val="0F1F3A"/>
                 </a:solidFill>
                 <a:latin typeface="Pretendard"/>
                 <a:ea typeface="Pretendard"/>
@@ -17014,7 +17014,7 @@
             <a:r>
               <a:rPr sz="650" b="0">
                 <a:solidFill>
-                  <a:srgbClr val="6C6A64"/>
+                  <a:srgbClr val="637797"/>
                 </a:solidFill>
                 <a:latin typeface="Pretendard"/>
                 <a:ea typeface="Pretendard"/>
@@ -17040,7 +17040,7 @@
           </a:prstGeom>
           <a:ln w="15240">
             <a:solidFill>
-              <a:srgbClr val="CC785C"/>
+              <a:srgbClr val="0B6FB3"/>
             </a:solidFill>
             <a:tailEnd type="triangle" w="med" len="med"/>
           </a:ln>
@@ -17078,11 +17078,11 @@
             </a:avLst>
           </a:prstGeom>
           <a:solidFill>
-            <a:srgbClr val="EFE9DE"/>
+            <a:srgbClr val="EDF7FF"/>
           </a:solidFill>
           <a:ln w="9525">
             <a:solidFill>
-              <a:srgbClr val="E6DFD8"/>
+              <a:srgbClr val="D6E3F1"/>
             </a:solidFill>
           </a:ln>
           <a:effectLst/>
@@ -17139,7 +17139,7 @@
             <a:r>
               <a:rPr sz="850" b="1">
                 <a:solidFill>
-                  <a:srgbClr val="141413"/>
+                  <a:srgbClr val="0F1F3A"/>
                 </a:solidFill>
                 <a:latin typeface="Pretendard"/>
                 <a:ea typeface="Pretendard"/>
@@ -17152,7 +17152,7 @@
             <a:r>
               <a:rPr sz="650" b="0">
                 <a:solidFill>
-                  <a:srgbClr val="6C6A64"/>
+                  <a:srgbClr val="637797"/>
                 </a:solidFill>
                 <a:latin typeface="Pretendard"/>
                 <a:ea typeface="Pretendard"/>
@@ -17178,7 +17178,7 @@
           </a:prstGeom>
           <a:ln w="15240">
             <a:solidFill>
-              <a:srgbClr val="CC785C"/>
+              <a:srgbClr val="0B6FB3"/>
             </a:solidFill>
             <a:tailEnd type="triangle" w="med" len="med"/>
           </a:ln>
@@ -17216,11 +17216,11 @@
             </a:avLst>
           </a:prstGeom>
           <a:solidFill>
-            <a:srgbClr val="EFE9DE"/>
+            <a:srgbClr val="EDF7FF"/>
           </a:solidFill>
           <a:ln w="9525">
             <a:solidFill>
-              <a:srgbClr val="E6DFD8"/>
+              <a:srgbClr val="D6E3F1"/>
             </a:solidFill>
           </a:ln>
           <a:effectLst/>
@@ -17277,7 +17277,7 @@
             <a:r>
               <a:rPr sz="850" b="1">
                 <a:solidFill>
-                  <a:srgbClr val="141413"/>
+                  <a:srgbClr val="0F1F3A"/>
                 </a:solidFill>
                 <a:latin typeface="Pretendard"/>
                 <a:ea typeface="Pretendard"/>
@@ -17290,7 +17290,7 @@
             <a:r>
               <a:rPr sz="650" b="0">
                 <a:solidFill>
-                  <a:srgbClr val="6C6A64"/>
+                  <a:srgbClr val="637797"/>
                 </a:solidFill>
                 <a:latin typeface="Pretendard"/>
                 <a:ea typeface="Pretendard"/>
@@ -17316,7 +17316,7 @@
           </a:prstGeom>
           <a:ln w="15240">
             <a:solidFill>
-              <a:srgbClr val="CC785C"/>
+              <a:srgbClr val="0B6FB3"/>
             </a:solidFill>
             <a:tailEnd type="triangle" w="med" len="med"/>
           </a:ln>
@@ -17354,11 +17354,11 @@
             </a:avLst>
           </a:prstGeom>
           <a:solidFill>
-            <a:srgbClr val="EFE9DE"/>
+            <a:srgbClr val="EDF7FF"/>
           </a:solidFill>
           <a:ln w="9525">
             <a:solidFill>
-              <a:srgbClr val="E6DFD8"/>
+              <a:srgbClr val="D6E3F1"/>
             </a:solidFill>
           </a:ln>
           <a:effectLst/>
@@ -17415,7 +17415,7 @@
             <a:r>
               <a:rPr sz="850" b="1">
                 <a:solidFill>
-                  <a:srgbClr val="141413"/>
+                  <a:srgbClr val="0F1F3A"/>
                 </a:solidFill>
                 <a:latin typeface="Pretendard"/>
                 <a:ea typeface="Pretendard"/>
@@ -17428,7 +17428,7 @@
             <a:r>
               <a:rPr sz="650" b="0">
                 <a:solidFill>
-                  <a:srgbClr val="6C6A64"/>
+                  <a:srgbClr val="637797"/>
                 </a:solidFill>
                 <a:latin typeface="Pretendard"/>
                 <a:ea typeface="Pretendard"/>
@@ -17454,7 +17454,7 @@
           </a:prstGeom>
           <a:ln w="15240">
             <a:solidFill>
-              <a:srgbClr val="CC785C"/>
+              <a:srgbClr val="0B6FB3"/>
             </a:solidFill>
             <a:tailEnd type="triangle" w="med" len="med"/>
           </a:ln>
@@ -17492,11 +17492,11 @@
             </a:avLst>
           </a:prstGeom>
           <a:solidFill>
-            <a:srgbClr val="EFE9DE"/>
+            <a:srgbClr val="EDF7FF"/>
           </a:solidFill>
           <a:ln w="9525">
             <a:solidFill>
-              <a:srgbClr val="E6DFD8"/>
+              <a:srgbClr val="D6E3F1"/>
             </a:solidFill>
           </a:ln>
           <a:effectLst/>
@@ -17553,7 +17553,7 @@
             <a:r>
               <a:rPr sz="850" b="1">
                 <a:solidFill>
-                  <a:srgbClr val="141413"/>
+                  <a:srgbClr val="0F1F3A"/>
                 </a:solidFill>
                 <a:latin typeface="Pretendard"/>
                 <a:ea typeface="Pretendard"/>
@@ -17566,7 +17566,7 @@
             <a:r>
               <a:rPr sz="650" b="0">
                 <a:solidFill>
-                  <a:srgbClr val="6C6A64"/>
+                  <a:srgbClr val="637797"/>
                 </a:solidFill>
                 <a:latin typeface="Pretendard"/>
                 <a:ea typeface="Pretendard"/>
@@ -17592,7 +17592,7 @@
           </a:prstGeom>
           <a:ln w="15240">
             <a:solidFill>
-              <a:srgbClr val="CC785C"/>
+              <a:srgbClr val="0B6FB3"/>
             </a:solidFill>
             <a:tailEnd type="triangle" w="med" len="med"/>
           </a:ln>
@@ -17630,7 +17630,7 @@
             </a:avLst>
           </a:prstGeom>
           <a:solidFill>
-            <a:srgbClr val="CC785C"/>
+            <a:srgbClr val="0B6FB3"/>
           </a:solidFill>
           <a:ln>
             <a:noFill/>
@@ -17702,7 +17702,7 @@
             <a:r>
               <a:rPr sz="650" b="0">
                 <a:solidFill>
-                  <a:srgbClr val="FAF9F5"/>
+                  <a:srgbClr val="EDF4FB"/>
                 </a:solidFill>
                 <a:latin typeface="Pretendard"/>
                 <a:ea typeface="Pretendard"/>
@@ -17728,7 +17728,7 @@
           </a:prstGeom>
           <a:ln w="15240">
             <a:solidFill>
-              <a:srgbClr val="CC785C"/>
+              <a:srgbClr val="0B6FB3"/>
             </a:solidFill>
             <a:tailEnd type="triangle" w="med" len="med"/>
           </a:ln>
@@ -17766,7 +17766,7 @@
             </a:avLst>
           </a:prstGeom>
           <a:solidFill>
-            <a:srgbClr val="CC785C"/>
+            <a:srgbClr val="0B6FB3"/>
           </a:solidFill>
           <a:ln>
             <a:noFill/>
@@ -17838,7 +17838,7 @@
             <a:r>
               <a:rPr sz="650" b="0">
                 <a:solidFill>
-                  <a:srgbClr val="FAF9F5"/>
+                  <a:srgbClr val="EDF4FB"/>
                 </a:solidFill>
                 <a:latin typeface="Pretendard"/>
                 <a:ea typeface="Pretendard"/>
@@ -17864,7 +17864,7 @@
           </a:prstGeom>
           <a:ln w="15240">
             <a:solidFill>
-              <a:srgbClr val="CC785C"/>
+              <a:srgbClr val="0B6FB3"/>
             </a:solidFill>
             <a:tailEnd type="triangle" w="med" len="med"/>
           </a:ln>
@@ -17902,7 +17902,7 @@
             </a:avLst>
           </a:prstGeom>
           <a:solidFill>
-            <a:srgbClr val="181715"/>
+            <a:srgbClr val="091C4D"/>
           </a:solidFill>
           <a:ln>
             <a:noFill/>
@@ -17961,7 +17961,7 @@
             <a:r>
               <a:rPr sz="850" b="1">
                 <a:solidFill>
-                  <a:srgbClr val="FAF9F5"/>
+                  <a:srgbClr val="EDF4FB"/>
                 </a:solidFill>
                 <a:latin typeface="Pretendard"/>
                 <a:ea typeface="Pretendard"/>
@@ -17974,7 +17974,7 @@
             <a:r>
               <a:rPr sz="650" b="0">
                 <a:solidFill>
-                  <a:srgbClr val="A09D96"/>
+                  <a:srgbClr val="9DB1CE"/>
                 </a:solidFill>
                 <a:latin typeface="Pretendard"/>
                 <a:ea typeface="Pretendard"/>
@@ -18014,7 +18014,7 @@
             <a:r>
               <a:rPr sz="750" b="0">
                 <a:solidFill>
-                  <a:srgbClr val="6C6A64"/>
+                  <a:srgbClr val="637797"/>
                 </a:solidFill>
                 <a:latin typeface="Pretendard"/>
                 <a:ea typeface="Pretendard"/>
@@ -18024,7 +18024,7 @@
             <a:r>
               <a:rPr sz="750" b="1">
                 <a:solidFill>
-                  <a:srgbClr val="A9583E"/>
+                  <a:srgbClr val="07569D"/>
                 </a:solidFill>
                 <a:latin typeface="Pretendard"/>
                 <a:ea typeface="Pretendard"/>
@@ -18034,7 +18034,7 @@
             <a:r>
               <a:rPr sz="750" b="0">
                 <a:solidFill>
-                  <a:srgbClr val="6C6A64"/>
+                  <a:srgbClr val="637797"/>
                 </a:solidFill>
                 <a:latin typeface="Pretendard"/>
                 <a:ea typeface="Pretendard"/>
@@ -18074,7 +18074,7 @@
             <a:r>
               <a:rPr sz="1050" b="1">
                 <a:solidFill>
-                  <a:srgbClr val="141413"/>
+                  <a:srgbClr val="0F1F3A"/>
                 </a:solidFill>
                 <a:latin typeface="Pretendard"/>
                 <a:ea typeface="Pretendard"/>
@@ -18101,11 +18101,11 @@
             </a:avLst>
           </a:prstGeom>
           <a:solidFill>
-            <a:srgbClr val="F5F0E8"/>
+            <a:srgbClr val="F6F9FD"/>
           </a:solidFill>
           <a:ln w="9525">
             <a:solidFill>
-              <a:srgbClr val="E6DFD8"/>
+              <a:srgbClr val="D6E3F1"/>
             </a:solidFill>
           </a:ln>
           <a:effectLst/>
@@ -18147,7 +18147,7 @@
             <a:avLst/>
           </a:prstGeom>
           <a:solidFill>
-            <a:srgbClr val="CC785C"/>
+            <a:srgbClr val="0B6FB3"/>
           </a:solidFill>
           <a:ln>
             <a:noFill/>
@@ -18216,7 +18216,7 @@
             <a:r>
               <a:rPr sz="950" b="1">
                 <a:solidFill>
-                  <a:srgbClr val="141413"/>
+                  <a:srgbClr val="0F1F3A"/>
                 </a:solidFill>
                 <a:latin typeface="Pretendard"/>
                 <a:ea typeface="Pretendard"/>
@@ -18256,7 +18256,7 @@
             <a:r>
               <a:rPr sz="800" b="0">
                 <a:solidFill>
-                  <a:srgbClr val="6C6A64"/>
+                  <a:srgbClr val="637797"/>
                 </a:solidFill>
                 <a:latin typeface="Pretendard"/>
                 <a:ea typeface="Pretendard"/>
@@ -18283,11 +18283,11 @@
             </a:avLst>
           </a:prstGeom>
           <a:solidFill>
-            <a:srgbClr val="F5F0E8"/>
+            <a:srgbClr val="F6F9FD"/>
           </a:solidFill>
           <a:ln w="9525">
             <a:solidFill>
-              <a:srgbClr val="E6DFD8"/>
+              <a:srgbClr val="D6E3F1"/>
             </a:solidFill>
           </a:ln>
           <a:effectLst/>
@@ -18329,7 +18329,7 @@
             <a:avLst/>
           </a:prstGeom>
           <a:solidFill>
-            <a:srgbClr val="CC785C"/>
+            <a:srgbClr val="0B6FB3"/>
           </a:solidFill>
           <a:ln>
             <a:noFill/>
@@ -18398,7 +18398,7 @@
             <a:r>
               <a:rPr sz="950" b="1">
                 <a:solidFill>
-                  <a:srgbClr val="141413"/>
+                  <a:srgbClr val="0F1F3A"/>
                 </a:solidFill>
                 <a:latin typeface="Pretendard"/>
                 <a:ea typeface="Pretendard"/>
@@ -18438,7 +18438,7 @@
             <a:r>
               <a:rPr sz="800" b="0">
                 <a:solidFill>
-                  <a:srgbClr val="6C6A64"/>
+                  <a:srgbClr val="637797"/>
                 </a:solidFill>
                 <a:latin typeface="Pretendard"/>
                 <a:ea typeface="Pretendard"/>
@@ -18465,11 +18465,11 @@
             </a:avLst>
           </a:prstGeom>
           <a:solidFill>
-            <a:srgbClr val="F5F0E8"/>
+            <a:srgbClr val="F6F9FD"/>
           </a:solidFill>
           <a:ln w="9525">
             <a:solidFill>
-              <a:srgbClr val="E6DFD8"/>
+              <a:srgbClr val="D6E3F1"/>
             </a:solidFill>
           </a:ln>
           <a:effectLst/>
@@ -18511,7 +18511,7 @@
             <a:avLst/>
           </a:prstGeom>
           <a:solidFill>
-            <a:srgbClr val="CC785C"/>
+            <a:srgbClr val="0B6FB3"/>
           </a:solidFill>
           <a:ln>
             <a:noFill/>
@@ -18580,7 +18580,7 @@
             <a:r>
               <a:rPr sz="950" b="1">
                 <a:solidFill>
-                  <a:srgbClr val="141413"/>
+                  <a:srgbClr val="0F1F3A"/>
                 </a:solidFill>
                 <a:latin typeface="Pretendard"/>
                 <a:ea typeface="Pretendard"/>
@@ -18620,7 +18620,7 @@
             <a:r>
               <a:rPr sz="800" b="0">
                 <a:solidFill>
-                  <a:srgbClr val="6C6A64"/>
+                  <a:srgbClr val="637797"/>
                 </a:solidFill>
                 <a:latin typeface="Pretendard"/>
                 <a:ea typeface="Pretendard"/>
@@ -18647,11 +18647,11 @@
             </a:avLst>
           </a:prstGeom>
           <a:solidFill>
-            <a:srgbClr val="F5F0E8"/>
+            <a:srgbClr val="F6F9FD"/>
           </a:solidFill>
           <a:ln w="9525">
             <a:solidFill>
-              <a:srgbClr val="E6DFD8"/>
+              <a:srgbClr val="D6E3F1"/>
             </a:solidFill>
           </a:ln>
           <a:effectLst/>
@@ -18693,7 +18693,7 @@
             <a:avLst/>
           </a:prstGeom>
           <a:solidFill>
-            <a:srgbClr val="CC785C"/>
+            <a:srgbClr val="0B6FB3"/>
           </a:solidFill>
           <a:ln>
             <a:noFill/>
@@ -18762,7 +18762,7 @@
             <a:r>
               <a:rPr sz="950" b="1">
                 <a:solidFill>
-                  <a:srgbClr val="141413"/>
+                  <a:srgbClr val="0F1F3A"/>
                 </a:solidFill>
                 <a:latin typeface="Pretendard"/>
                 <a:ea typeface="Pretendard"/>
@@ -18802,7 +18802,7 @@
             <a:r>
               <a:rPr sz="800" b="0">
                 <a:solidFill>
-                  <a:srgbClr val="6C6A64"/>
+                  <a:srgbClr val="637797"/>
                 </a:solidFill>
                 <a:latin typeface="Pretendard"/>
                 <a:ea typeface="Pretendard"/>
@@ -18842,7 +18842,7 @@
             <a:r>
               <a:rPr sz="1050" b="1">
                 <a:solidFill>
-                  <a:srgbClr val="141413"/>
+                  <a:srgbClr val="0F1F3A"/>
                 </a:solidFill>
                 <a:latin typeface="Pretendard"/>
                 <a:ea typeface="Pretendard"/>
@@ -18852,12 +18852,12 @@
             <a:r>
               <a:rPr sz="850" b="0">
                 <a:solidFill>
-                  <a:srgbClr val="6C6A64"/>
+                  <a:srgbClr val="637797"/>
                 </a:solidFill>
                 <a:latin typeface="Pretendard"/>
                 <a:ea typeface="Pretendard"/>
               </a:rPr>
-              <a:t>— 사람 승인자 2 + AI 에이전트 14</a:t>
+              <a:t>— 사람 승인자 2 + AI 에이전트 14 · 스킬 25</a:t>
             </a:r>
           </a:p>
         </p:txBody>
@@ -18951,7 +18951,7 @@
             <a:r>
               <a:rPr sz="650" b="0">
                 <a:solidFill>
-                  <a:srgbClr val="A09D96"/>
+                  <a:srgbClr val="9DB1CE"/>
                 </a:solidFill>
                 <a:latin typeface="Pretendard"/>
                 <a:ea typeface="Pretendard"/>
@@ -19050,7 +19050,7 @@
             <a:r>
               <a:rPr sz="650" b="0">
                 <a:solidFill>
-                  <a:srgbClr val="A09D96"/>
+                  <a:srgbClr val="9DB1CE"/>
                 </a:solidFill>
                 <a:latin typeface="Pretendard"/>
                 <a:ea typeface="Pretendard"/>
@@ -19077,7 +19077,7 @@
             </a:avLst>
           </a:prstGeom>
           <a:solidFill>
-            <a:srgbClr val="181715"/>
+            <a:srgbClr val="091C4D"/>
           </a:solidFill>
           <a:ln>
             <a:noFill/>
@@ -19136,7 +19136,7 @@
             <a:r>
               <a:rPr sz="850" b="1">
                 <a:solidFill>
-                  <a:srgbClr val="FAF9F5"/>
+                  <a:srgbClr val="EDF4FB"/>
                 </a:solidFill>
                 <a:latin typeface="Pretendard"/>
                 <a:ea typeface="Pretendard"/>
@@ -19163,11 +19163,11 @@
             </a:avLst>
           </a:prstGeom>
           <a:solidFill>
-            <a:srgbClr val="EFE9DE"/>
+            <a:srgbClr val="EDF7FF"/>
           </a:solidFill>
           <a:ln w="9525">
             <a:solidFill>
-              <a:srgbClr val="E6DFD8"/>
+              <a:srgbClr val="D6E3F1"/>
             </a:solidFill>
           </a:ln>
           <a:effectLst/>
@@ -19194,7 +19194,7 @@
             <a:r>
               <a:rPr sz="750" b="1">
                 <a:solidFill>
-                  <a:srgbClr val="141413"/>
+                  <a:srgbClr val="0F1F3A"/>
                 </a:solidFill>
                 <a:latin typeface="Pretendard"/>
                 <a:ea typeface="Pretendard"/>
@@ -19221,11 +19221,11 @@
             </a:avLst>
           </a:prstGeom>
           <a:solidFill>
-            <a:srgbClr val="EFE9DE"/>
+            <a:srgbClr val="EDF7FF"/>
           </a:solidFill>
           <a:ln w="9525">
             <a:solidFill>
-              <a:srgbClr val="E6DFD8"/>
+              <a:srgbClr val="D6E3F1"/>
             </a:solidFill>
           </a:ln>
           <a:effectLst/>
@@ -19252,7 +19252,7 @@
             <a:r>
               <a:rPr sz="750" b="1">
                 <a:solidFill>
-                  <a:srgbClr val="141413"/>
+                  <a:srgbClr val="0F1F3A"/>
                 </a:solidFill>
                 <a:latin typeface="Pretendard"/>
                 <a:ea typeface="Pretendard"/>
@@ -19279,11 +19279,11 @@
             </a:avLst>
           </a:prstGeom>
           <a:solidFill>
-            <a:srgbClr val="EFE9DE"/>
+            <a:srgbClr val="EDF7FF"/>
           </a:solidFill>
           <a:ln w="9525">
             <a:solidFill>
-              <a:srgbClr val="E6DFD8"/>
+              <a:srgbClr val="D6E3F1"/>
             </a:solidFill>
           </a:ln>
           <a:effectLst/>
@@ -19310,7 +19310,7 @@
             <a:r>
               <a:rPr sz="750" b="1">
                 <a:solidFill>
-                  <a:srgbClr val="141413"/>
+                  <a:srgbClr val="0F1F3A"/>
                 </a:solidFill>
                 <a:latin typeface="Pretendard"/>
                 <a:ea typeface="Pretendard"/>
@@ -19337,11 +19337,11 @@
             </a:avLst>
           </a:prstGeom>
           <a:solidFill>
-            <a:srgbClr val="EFE9DE"/>
+            <a:srgbClr val="EDF7FF"/>
           </a:solidFill>
           <a:ln w="9525">
             <a:solidFill>
-              <a:srgbClr val="E6DFD8"/>
+              <a:srgbClr val="D6E3F1"/>
             </a:solidFill>
           </a:ln>
           <a:effectLst/>
@@ -19368,7 +19368,7 @@
             <a:r>
               <a:rPr sz="750" b="1">
                 <a:solidFill>
-                  <a:srgbClr val="141413"/>
+                  <a:srgbClr val="0F1F3A"/>
                 </a:solidFill>
                 <a:latin typeface="Pretendard"/>
                 <a:ea typeface="Pretendard"/>
@@ -19395,11 +19395,11 @@
             </a:avLst>
           </a:prstGeom>
           <a:solidFill>
-            <a:srgbClr val="EFE9DE"/>
+            <a:srgbClr val="EDF7FF"/>
           </a:solidFill>
           <a:ln w="9525">
             <a:solidFill>
-              <a:srgbClr val="E6DFD8"/>
+              <a:srgbClr val="D6E3F1"/>
             </a:solidFill>
           </a:ln>
           <a:effectLst/>
@@ -19426,7 +19426,7 @@
             <a:r>
               <a:rPr sz="750" b="1">
                 <a:solidFill>
-                  <a:srgbClr val="141413"/>
+                  <a:srgbClr val="0F1F3A"/>
                 </a:solidFill>
                 <a:latin typeface="Pretendard"/>
                 <a:ea typeface="Pretendard"/>
@@ -19453,11 +19453,11 @@
             </a:avLst>
           </a:prstGeom>
           <a:solidFill>
-            <a:srgbClr val="EFE9DE"/>
+            <a:srgbClr val="EDF7FF"/>
           </a:solidFill>
           <a:ln w="9525">
             <a:solidFill>
-              <a:srgbClr val="E6DFD8"/>
+              <a:srgbClr val="D6E3F1"/>
             </a:solidFill>
           </a:ln>
           <a:effectLst/>
@@ -19484,7 +19484,7 @@
             <a:r>
               <a:rPr sz="750" b="1">
                 <a:solidFill>
-                  <a:srgbClr val="141413"/>
+                  <a:srgbClr val="0F1F3A"/>
                 </a:solidFill>
                 <a:latin typeface="Pretendard"/>
                 <a:ea typeface="Pretendard"/>
@@ -19511,11 +19511,11 @@
             </a:avLst>
           </a:prstGeom>
           <a:solidFill>
-            <a:srgbClr val="F3E3DB"/>
+            <a:srgbClr val="DFF7FF"/>
           </a:solidFill>
           <a:ln w="9525">
             <a:solidFill>
-              <a:srgbClr val="E6DFD8"/>
+              <a:srgbClr val="D6E3F1"/>
             </a:solidFill>
           </a:ln>
           <a:effectLst/>
@@ -19572,7 +19572,7 @@
             <a:r>
               <a:rPr sz="800" b="1">
                 <a:solidFill>
-                  <a:srgbClr val="A9583E"/>
+                  <a:srgbClr val="07569D"/>
                 </a:solidFill>
                 <a:latin typeface="Pretendard"/>
                 <a:ea typeface="Pretendard"/>
@@ -19582,7 +19582,7 @@
             <a:r>
               <a:rPr sz="750" b="0">
                 <a:solidFill>
-                  <a:srgbClr val="6C6A64"/>
+                  <a:srgbClr val="637797"/>
                 </a:solidFill>
                 <a:latin typeface="Pretendard"/>
                 <a:ea typeface="Pretendard"/>
@@ -19622,7 +19622,7 @@
             <a:r>
               <a:rPr sz="750" b="0">
                 <a:solidFill>
-                  <a:srgbClr val="3D3D3A"/>
+                  <a:srgbClr val="24395F"/>
                 </a:solidFill>
                 <a:latin typeface="Pretendard"/>
                 <a:ea typeface="Pretendard"/>
@@ -19649,7 +19649,7 @@
             </a:avLst>
           </a:prstGeom>
           <a:solidFill>
-            <a:srgbClr val="181715"/>
+            <a:srgbClr val="091C4D"/>
           </a:solidFill>
           <a:ln>
             <a:noFill/>
@@ -19708,7 +19708,7 @@
             <a:r>
               <a:rPr sz="850" b="1">
                 <a:solidFill>
-                  <a:srgbClr val="E8A55A"/>
+                  <a:srgbClr val="1CA9D6"/>
                 </a:solidFill>
                 <a:latin typeface="Pretendard"/>
                 <a:ea typeface="Pretendard"/>
@@ -19718,7 +19718,7 @@
             <a:r>
               <a:rPr sz="850" b="0">
                 <a:solidFill>
-                  <a:srgbClr val="FAF9F5"/>
+                  <a:srgbClr val="EDF4FB"/>
                 </a:solidFill>
                 <a:latin typeface="Pretendard"/>
                 <a:ea typeface="Pretendard"/>
@@ -20478,7 +20478,7 @@
             <a:r>
               <a:rPr sz="1100" b="1">
                 <a:solidFill>
-                  <a:srgbClr val="141413"/>
+                  <a:srgbClr val="0F1F3A"/>
                 </a:solidFill>
                 <a:latin typeface="Pretendard"/>
                 <a:ea typeface="Pretendard"/>
@@ -20512,7 +20512,7 @@
           </a:prstGeom>
           <a:ln w="12700">
             <a:solidFill>
-              <a:srgbClr val="E6DFD8"/>
+              <a:srgbClr val="D6E3F1"/>
             </a:solidFill>
           </a:ln>
           <a:effectLst/>
@@ -20548,12 +20548,12 @@
             <a:r>
               <a:rPr sz="750" b="0">
                 <a:solidFill>
-                  <a:srgbClr val="6C6A64"/>
+                  <a:srgbClr val="637797"/>
                 </a:solidFill>
                 <a:latin typeface="Pretendard"/>
                 <a:ea typeface="Pretendard"/>
               </a:rPr>
-              <a:t>대시보드 — 한 줄 지시 실행 · 실시간 실행 · 처리 흐름 상태 · 우측 케이스 상세</a:t>
+              <a:t>대시보드 — 한 줄 지시 실행 · 실시간 실행 · 운영 비용 해석 · 우측 케이스 상세</a:t>
             </a:r>
           </a:p>
         </p:txBody>
@@ -20582,7 +20582,7 @@
           </a:prstGeom>
           <a:ln w="12700">
             <a:solidFill>
-              <a:srgbClr val="E6DFD8"/>
+              <a:srgbClr val="D6E3F1"/>
             </a:solidFill>
           </a:ln>
           <a:effectLst/>
@@ -20590,7 +20590,7 @@
       </p:pic>
       <p:pic>
         <p:nvPicPr>
-          <p:cNvPr id="22" name="Picture 21" descr="skills.png"/>
+          <p:cNvPr id="22" name="Picture 21" descr="plugins.png"/>
           <p:cNvPicPr>
             <a:picLocks noChangeAspect="1"/>
           </p:cNvPicPr>
@@ -20612,7 +20612,7 @@
           </a:prstGeom>
           <a:ln w="12700">
             <a:solidFill>
-              <a:srgbClr val="E6DFD8"/>
+              <a:srgbClr val="D6E3F1"/>
             </a:solidFill>
           </a:ln>
           <a:effectLst/>
@@ -20648,7 +20648,7 @@
             <a:r>
               <a:rPr sz="750" b="0">
                 <a:solidFill>
-                  <a:srgbClr val="6C6A64"/>
+                  <a:srgbClr val="637797"/>
                 </a:solidFill>
                 <a:latin typeface="Pretendard"/>
                 <a:ea typeface="Pretendard"/>
@@ -20688,12 +20688,12 @@
             <a:r>
               <a:rPr sz="750" b="0">
                 <a:solidFill>
-                  <a:srgbClr val="6C6A64"/>
+                  <a:srgbClr val="637797"/>
                 </a:solidFill>
                 <a:latin typeface="Pretendard"/>
                 <a:ea typeface="Pretendard"/>
               </a:rPr>
-              <a:t>스킬 저장소 (25종)</a:t>
+              <a:t>플러그인 · MCP 커넥터 (6종)</a:t>
             </a:r>
           </a:p>
         </p:txBody>
@@ -20728,7 +20728,7 @@
             <a:r>
               <a:rPr sz="1100" b="1">
                 <a:solidFill>
-                  <a:srgbClr val="141413"/>
+                  <a:srgbClr val="0F1F3A"/>
                 </a:solidFill>
                 <a:latin typeface="Pretendard"/>
                 <a:ea typeface="Pretendard"/>
@@ -20755,11 +20755,11 @@
             </a:avLst>
           </a:prstGeom>
           <a:solidFill>
-            <a:srgbClr val="F5F0E8"/>
+            <a:srgbClr val="F6F9FD"/>
           </a:solidFill>
           <a:ln w="9525">
             <a:solidFill>
-              <a:srgbClr val="E6DFD8"/>
+              <a:srgbClr val="D6E3F1"/>
             </a:solidFill>
           </a:ln>
           <a:effectLst/>
@@ -20803,7 +20803,7 @@
             </a:avLst>
           </a:prstGeom>
           <a:solidFill>
-            <a:srgbClr val="E4F2E6"/>
+            <a:srgbClr val="E2F7F1"/>
           </a:solidFill>
           <a:ln>
             <a:noFill/>
@@ -20832,7 +20832,7 @@
             <a:r>
               <a:rPr sz="700" b="1">
                 <a:solidFill>
-                  <a:srgbClr val="5DB872"/>
+                  <a:srgbClr val="0F8F72"/>
                 </a:solidFill>
                 <a:latin typeface="Pretendard"/>
                 <a:ea typeface="Pretendard"/>
@@ -20872,7 +20872,7 @@
             <a:r>
               <a:rPr sz="950" b="1">
                 <a:solidFill>
-                  <a:srgbClr val="141413"/>
+                  <a:srgbClr val="0F1F3A"/>
                 </a:solidFill>
                 <a:latin typeface="Pretendard"/>
                 <a:ea typeface="Pretendard"/>
@@ -20912,7 +20912,7 @@
             <a:r>
               <a:rPr sz="800" b="0">
                 <a:solidFill>
-                  <a:srgbClr val="6C6A64"/>
+                  <a:srgbClr val="637797"/>
                 </a:solidFill>
                 <a:latin typeface="Pretendard"/>
                 <a:ea typeface="Pretendard"/>
@@ -20952,7 +20952,7 @@
             <a:r>
               <a:rPr sz="750" b="1">
                 <a:solidFill>
-                  <a:srgbClr val="A9583E"/>
+                  <a:srgbClr val="07569D"/>
                 </a:solidFill>
                 <a:latin typeface="Pretendard"/>
                 <a:ea typeface="Pretendard"/>
@@ -20962,7 +20962,7 @@
             <a:r>
               <a:rPr sz="750" b="0">
                 <a:solidFill>
-                  <a:srgbClr val="6C6A64"/>
+                  <a:srgbClr val="637797"/>
                 </a:solidFill>
                 <a:latin typeface="Pretendard"/>
                 <a:ea typeface="Pretendard"/>
@@ -20989,11 +20989,11 @@
             </a:avLst>
           </a:prstGeom>
           <a:solidFill>
-            <a:srgbClr val="F5F0E8"/>
+            <a:srgbClr val="F6F9FD"/>
           </a:solidFill>
           <a:ln w="9525">
             <a:solidFill>
-              <a:srgbClr val="E6DFD8"/>
+              <a:srgbClr val="D6E3F1"/>
             </a:solidFill>
           </a:ln>
           <a:effectLst/>
@@ -21037,7 +21037,7 @@
             </a:avLst>
           </a:prstGeom>
           <a:solidFill>
-            <a:srgbClr val="E4F2E6"/>
+            <a:srgbClr val="E2F7F1"/>
           </a:solidFill>
           <a:ln>
             <a:noFill/>
@@ -21066,7 +21066,7 @@
             <a:r>
               <a:rPr sz="700" b="1">
                 <a:solidFill>
-                  <a:srgbClr val="5DB872"/>
+                  <a:srgbClr val="0F8F72"/>
                 </a:solidFill>
                 <a:latin typeface="Pretendard"/>
                 <a:ea typeface="Pretendard"/>
@@ -21106,7 +21106,7 @@
             <a:r>
               <a:rPr sz="950" b="1">
                 <a:solidFill>
-                  <a:srgbClr val="141413"/>
+                  <a:srgbClr val="0F1F3A"/>
                 </a:solidFill>
                 <a:latin typeface="Pretendard"/>
                 <a:ea typeface="Pretendard"/>
@@ -21146,7 +21146,7 @@
             <a:r>
               <a:rPr sz="800" b="0">
                 <a:solidFill>
-                  <a:srgbClr val="6C6A64"/>
+                  <a:srgbClr val="637797"/>
                 </a:solidFill>
                 <a:latin typeface="Pretendard"/>
                 <a:ea typeface="Pretendard"/>
@@ -21186,7 +21186,7 @@
             <a:r>
               <a:rPr sz="750" b="1">
                 <a:solidFill>
-                  <a:srgbClr val="A9583E"/>
+                  <a:srgbClr val="07569D"/>
                 </a:solidFill>
                 <a:latin typeface="Pretendard"/>
                 <a:ea typeface="Pretendard"/>
@@ -21196,7 +21196,7 @@
             <a:r>
               <a:rPr sz="750" b="0">
                 <a:solidFill>
-                  <a:srgbClr val="6C6A64"/>
+                  <a:srgbClr val="637797"/>
                 </a:solidFill>
                 <a:latin typeface="Pretendard"/>
                 <a:ea typeface="Pretendard"/>
@@ -21223,11 +21223,11 @@
             </a:avLst>
           </a:prstGeom>
           <a:solidFill>
-            <a:srgbClr val="F5F0E8"/>
+            <a:srgbClr val="F6F9FD"/>
           </a:solidFill>
           <a:ln w="9525">
             <a:solidFill>
-              <a:srgbClr val="E6DFD8"/>
+              <a:srgbClr val="D6E3F1"/>
             </a:solidFill>
           </a:ln>
           <a:effectLst/>
@@ -21271,7 +21271,7 @@
             </a:avLst>
           </a:prstGeom>
           <a:solidFill>
-            <a:srgbClr val="E4F2E6"/>
+            <a:srgbClr val="E2F7F1"/>
           </a:solidFill>
           <a:ln>
             <a:noFill/>
@@ -21300,7 +21300,7 @@
             <a:r>
               <a:rPr sz="700" b="1">
                 <a:solidFill>
-                  <a:srgbClr val="5DB872"/>
+                  <a:srgbClr val="0F8F72"/>
                 </a:solidFill>
                 <a:latin typeface="Pretendard"/>
                 <a:ea typeface="Pretendard"/>
@@ -21340,7 +21340,7 @@
             <a:r>
               <a:rPr sz="950" b="1">
                 <a:solidFill>
-                  <a:srgbClr val="141413"/>
+                  <a:srgbClr val="0F1F3A"/>
                 </a:solidFill>
                 <a:latin typeface="Pretendard"/>
                 <a:ea typeface="Pretendard"/>
@@ -21380,7 +21380,7 @@
             <a:r>
               <a:rPr sz="800" b="0">
                 <a:solidFill>
-                  <a:srgbClr val="6C6A64"/>
+                  <a:srgbClr val="637797"/>
                 </a:solidFill>
                 <a:latin typeface="Pretendard"/>
                 <a:ea typeface="Pretendard"/>
@@ -21420,7 +21420,7 @@
             <a:r>
               <a:rPr sz="750" b="1">
                 <a:solidFill>
-                  <a:srgbClr val="A9583E"/>
+                  <a:srgbClr val="07569D"/>
                 </a:solidFill>
                 <a:latin typeface="Pretendard"/>
                 <a:ea typeface="Pretendard"/>
@@ -21430,7 +21430,7 @@
             <a:r>
               <a:rPr sz="750" b="0">
                 <a:solidFill>
-                  <a:srgbClr val="6C6A64"/>
+                  <a:srgbClr val="637797"/>
                 </a:solidFill>
                 <a:latin typeface="Pretendard"/>
                 <a:ea typeface="Pretendard"/>
@@ -21457,11 +21457,11 @@
             </a:avLst>
           </a:prstGeom>
           <a:solidFill>
-            <a:srgbClr val="F5F0E8"/>
+            <a:srgbClr val="F6F9FD"/>
           </a:solidFill>
           <a:ln w="9525">
             <a:solidFill>
-              <a:srgbClr val="E6DFD8"/>
+              <a:srgbClr val="D6E3F1"/>
             </a:solidFill>
           </a:ln>
           <a:effectLst/>
@@ -21505,7 +21505,7 @@
             </a:avLst>
           </a:prstGeom>
           <a:solidFill>
-            <a:srgbClr val="E4F2E6"/>
+            <a:srgbClr val="E2F7F1"/>
           </a:solidFill>
           <a:ln>
             <a:noFill/>
@@ -21534,7 +21534,7 @@
             <a:r>
               <a:rPr sz="700" b="1">
                 <a:solidFill>
-                  <a:srgbClr val="5DB872"/>
+                  <a:srgbClr val="0F8F72"/>
                 </a:solidFill>
                 <a:latin typeface="Pretendard"/>
                 <a:ea typeface="Pretendard"/>
@@ -21574,7 +21574,7 @@
             <a:r>
               <a:rPr sz="950" b="1">
                 <a:solidFill>
-                  <a:srgbClr val="141413"/>
+                  <a:srgbClr val="0F1F3A"/>
                 </a:solidFill>
                 <a:latin typeface="Pretendard"/>
                 <a:ea typeface="Pretendard"/>
@@ -21614,7 +21614,7 @@
             <a:r>
               <a:rPr sz="800" b="0">
                 <a:solidFill>
-                  <a:srgbClr val="6C6A64"/>
+                  <a:srgbClr val="637797"/>
                 </a:solidFill>
                 <a:latin typeface="Pretendard"/>
                 <a:ea typeface="Pretendard"/>
@@ -21654,7 +21654,7 @@
             <a:r>
               <a:rPr sz="750" b="1">
                 <a:solidFill>
-                  <a:srgbClr val="A9583E"/>
+                  <a:srgbClr val="07569D"/>
                 </a:solidFill>
                 <a:latin typeface="Pretendard"/>
                 <a:ea typeface="Pretendard"/>
@@ -21664,7 +21664,7 @@
             <a:r>
               <a:rPr sz="750" b="0">
                 <a:solidFill>
-                  <a:srgbClr val="6C6A64"/>
+                  <a:srgbClr val="637797"/>
                 </a:solidFill>
                 <a:latin typeface="Pretendard"/>
                 <a:ea typeface="Pretendard"/>
@@ -21691,11 +21691,11 @@
             </a:avLst>
           </a:prstGeom>
           <a:solidFill>
-            <a:srgbClr val="F5F0E8"/>
+            <a:srgbClr val="F6F9FD"/>
           </a:solidFill>
           <a:ln w="9525">
             <a:solidFill>
-              <a:srgbClr val="E6DFD8"/>
+              <a:srgbClr val="D6E3F1"/>
             </a:solidFill>
           </a:ln>
           <a:effectLst/>
@@ -21739,7 +21739,7 @@
             </a:avLst>
           </a:prstGeom>
           <a:solidFill>
-            <a:srgbClr val="E4F2E6"/>
+            <a:srgbClr val="E2F7F1"/>
           </a:solidFill>
           <a:ln>
             <a:noFill/>
@@ -21768,7 +21768,7 @@
             <a:r>
               <a:rPr sz="700" b="1">
                 <a:solidFill>
-                  <a:srgbClr val="5DB872"/>
+                  <a:srgbClr val="0F8F72"/>
                 </a:solidFill>
                 <a:latin typeface="Pretendard"/>
                 <a:ea typeface="Pretendard"/>
@@ -21808,7 +21808,7 @@
             <a:r>
               <a:rPr sz="950" b="1">
                 <a:solidFill>
-                  <a:srgbClr val="141413"/>
+                  <a:srgbClr val="0F1F3A"/>
                 </a:solidFill>
                 <a:latin typeface="Pretendard"/>
                 <a:ea typeface="Pretendard"/>
@@ -21848,7 +21848,7 @@
             <a:r>
               <a:rPr sz="800" b="0">
                 <a:solidFill>
-                  <a:srgbClr val="6C6A64"/>
+                  <a:srgbClr val="637797"/>
                 </a:solidFill>
                 <a:latin typeface="Pretendard"/>
                 <a:ea typeface="Pretendard"/>
@@ -21888,7 +21888,7 @@
             <a:r>
               <a:rPr sz="750" b="1">
                 <a:solidFill>
-                  <a:srgbClr val="A9583E"/>
+                  <a:srgbClr val="07569D"/>
                 </a:solidFill>
                 <a:latin typeface="Pretendard"/>
                 <a:ea typeface="Pretendard"/>
@@ -21898,7 +21898,7 @@
             <a:r>
               <a:rPr sz="750" b="0">
                 <a:solidFill>
-                  <a:srgbClr val="6C6A64"/>
+                  <a:srgbClr val="637797"/>
                 </a:solidFill>
                 <a:latin typeface="Pretendard"/>
                 <a:ea typeface="Pretendard"/>
@@ -21925,11 +21925,11 @@
             </a:avLst>
           </a:prstGeom>
           <a:solidFill>
-            <a:srgbClr val="F5F0E8"/>
+            <a:srgbClr val="F6F9FD"/>
           </a:solidFill>
           <a:ln w="9525">
             <a:solidFill>
-              <a:srgbClr val="E6DFD8"/>
+              <a:srgbClr val="D6E3F1"/>
             </a:solidFill>
           </a:ln>
           <a:effectLst/>
@@ -21973,7 +21973,7 @@
             </a:avLst>
           </a:prstGeom>
           <a:solidFill>
-            <a:srgbClr val="E4F2E6"/>
+            <a:srgbClr val="E2F7F1"/>
           </a:solidFill>
           <a:ln>
             <a:noFill/>
@@ -22002,7 +22002,7 @@
             <a:r>
               <a:rPr sz="700" b="1">
                 <a:solidFill>
-                  <a:srgbClr val="5DB872"/>
+                  <a:srgbClr val="0F8F72"/>
                 </a:solidFill>
                 <a:latin typeface="Pretendard"/>
                 <a:ea typeface="Pretendard"/>
@@ -22042,7 +22042,7 @@
             <a:r>
               <a:rPr sz="950" b="1">
                 <a:solidFill>
-                  <a:srgbClr val="141413"/>
+                  <a:srgbClr val="0F1F3A"/>
                 </a:solidFill>
                 <a:latin typeface="Pretendard"/>
                 <a:ea typeface="Pretendard"/>
@@ -22082,7 +22082,7 @@
             <a:r>
               <a:rPr sz="800" b="0">
                 <a:solidFill>
-                  <a:srgbClr val="6C6A64"/>
+                  <a:srgbClr val="637797"/>
                 </a:solidFill>
                 <a:latin typeface="Pretendard"/>
                 <a:ea typeface="Pretendard"/>
@@ -22122,7 +22122,7 @@
             <a:r>
               <a:rPr sz="750" b="1">
                 <a:solidFill>
-                  <a:srgbClr val="A9583E"/>
+                  <a:srgbClr val="07569D"/>
                 </a:solidFill>
                 <a:latin typeface="Pretendard"/>
                 <a:ea typeface="Pretendard"/>
@@ -22132,7 +22132,7 @@
             <a:r>
               <a:rPr sz="750" b="0">
                 <a:solidFill>
-                  <a:srgbClr val="6C6A64"/>
+                  <a:srgbClr val="637797"/>
                 </a:solidFill>
                 <a:latin typeface="Pretendard"/>
                 <a:ea typeface="Pretendard"/>
@@ -22159,7 +22159,7 @@
             </a:avLst>
           </a:prstGeom>
           <a:solidFill>
-            <a:srgbClr val="181715"/>
+            <a:srgbClr val="091C4D"/>
           </a:solidFill>
           <a:ln>
             <a:noFill/>
@@ -22218,7 +22218,7 @@
             <a:r>
               <a:rPr sz="850" b="1">
                 <a:solidFill>
-                  <a:srgbClr val="E8A55A"/>
+                  <a:srgbClr val="1CA9D6"/>
                 </a:solidFill>
                 <a:latin typeface="Pretendard"/>
                 <a:ea typeface="Pretendard"/>
@@ -22228,12 +22228,12 @@
             <a:r>
               <a:rPr sz="850" b="0">
                 <a:solidFill>
-                  <a:srgbClr val="FAF9F5"/>
+                  <a:srgbClr val="EDF4FB"/>
                 </a:solidFill>
                 <a:latin typeface="Pretendard"/>
                 <a:ea typeface="Pretendard"/>
               </a:rPr>
-              <a:t>판단(위험 진단) → 행동(조치 초안) → 검증(승인·감사) — github.com/LSB-afk/JB-Fin-AI-Challenge</a:t>
+              <a:t>에이전트 14 · 스킬 25 · 플러그인 6 · 화면 15 · E2E 19 — github.com/LSB-afk/JB-Fin-AI-Challenge</a:t>
             </a:r>
           </a:p>
         </p:txBody>
@@ -22974,7 +22974,7 @@
             <a:r>
               <a:rPr sz="1100" b="1">
                 <a:solidFill>
-                  <a:srgbClr val="141413"/>
+                  <a:srgbClr val="0F1F3A"/>
                 </a:solidFill>
                 <a:latin typeface="Pretendard"/>
                 <a:ea typeface="Pretendard"/>
@@ -22984,7 +22984,7 @@
             <a:r>
               <a:rPr sz="900" b="0">
                 <a:solidFill>
-                  <a:srgbClr val="6C6A64"/>
+                  <a:srgbClr val="637797"/>
                 </a:solidFill>
                 <a:latin typeface="Pretendard"/>
                 <a:ea typeface="Pretendard"/>
@@ -23011,11 +23011,11 @@
             </a:avLst>
           </a:prstGeom>
           <a:solidFill>
-            <a:srgbClr val="EFE9DE"/>
+            <a:srgbClr val="EDF7FF"/>
           </a:solidFill>
           <a:ln w="9525">
             <a:solidFill>
-              <a:srgbClr val="E6DFD8"/>
+              <a:srgbClr val="D6E3F1"/>
             </a:solidFill>
           </a:ln>
           <a:effectLst/>
@@ -23072,7 +23072,7 @@
             <a:r>
               <a:rPr sz="850" b="1">
                 <a:solidFill>
-                  <a:srgbClr val="141413"/>
+                  <a:srgbClr val="0F1F3A"/>
                 </a:solidFill>
                 <a:latin typeface="Pretendard"/>
                 <a:ea typeface="Pretendard"/>
@@ -23085,7 +23085,7 @@
             <a:r>
               <a:rPr sz="650" b="0">
                 <a:solidFill>
-                  <a:srgbClr val="6C6A64"/>
+                  <a:srgbClr val="637797"/>
                 </a:solidFill>
                 <a:latin typeface="Pretendard"/>
                 <a:ea typeface="Pretendard"/>
@@ -23111,7 +23111,7 @@
           </a:prstGeom>
           <a:ln w="15240">
             <a:solidFill>
-              <a:srgbClr val="CC785C"/>
+              <a:srgbClr val="0B6FB3"/>
             </a:solidFill>
             <a:tailEnd type="triangle" w="med" len="med"/>
           </a:ln>
@@ -23149,11 +23149,11 @@
             </a:avLst>
           </a:prstGeom>
           <a:solidFill>
-            <a:srgbClr val="EFE9DE"/>
+            <a:srgbClr val="EDF7FF"/>
           </a:solidFill>
           <a:ln w="9525">
             <a:solidFill>
-              <a:srgbClr val="E6DFD8"/>
+              <a:srgbClr val="D6E3F1"/>
             </a:solidFill>
           </a:ln>
           <a:effectLst/>
@@ -23210,7 +23210,7 @@
             <a:r>
               <a:rPr sz="850" b="1">
                 <a:solidFill>
-                  <a:srgbClr val="141413"/>
+                  <a:srgbClr val="0F1F3A"/>
                 </a:solidFill>
                 <a:latin typeface="Pretendard"/>
                 <a:ea typeface="Pretendard"/>
@@ -23223,7 +23223,7 @@
             <a:r>
               <a:rPr sz="650" b="0">
                 <a:solidFill>
-                  <a:srgbClr val="6C6A64"/>
+                  <a:srgbClr val="637797"/>
                 </a:solidFill>
                 <a:latin typeface="Pretendard"/>
                 <a:ea typeface="Pretendard"/>
@@ -23249,7 +23249,7 @@
           </a:prstGeom>
           <a:ln w="15240">
             <a:solidFill>
-              <a:srgbClr val="CC785C"/>
+              <a:srgbClr val="0B6FB3"/>
             </a:solidFill>
             <a:tailEnd type="triangle" w="med" len="med"/>
           </a:ln>
@@ -23287,7 +23287,7 @@
             </a:avLst>
           </a:prstGeom>
           <a:solidFill>
-            <a:srgbClr val="CC785C"/>
+            <a:srgbClr val="0B6FB3"/>
           </a:solidFill>
           <a:ln>
             <a:noFill/>
@@ -23359,7 +23359,7 @@
             <a:r>
               <a:rPr sz="650" b="0">
                 <a:solidFill>
-                  <a:srgbClr val="FAF9F5"/>
+                  <a:srgbClr val="EDF4FB"/>
                 </a:solidFill>
                 <a:latin typeface="Pretendard"/>
                 <a:ea typeface="Pretendard"/>
@@ -23385,7 +23385,7 @@
           </a:prstGeom>
           <a:ln w="15240">
             <a:solidFill>
-              <a:srgbClr val="CC785C"/>
+              <a:srgbClr val="0B6FB3"/>
             </a:solidFill>
             <a:tailEnd type="triangle" w="med" len="med"/>
           </a:ln>
@@ -23423,7 +23423,7 @@
             </a:avLst>
           </a:prstGeom>
           <a:solidFill>
-            <a:srgbClr val="CC785C"/>
+            <a:srgbClr val="0B6FB3"/>
           </a:solidFill>
           <a:ln>
             <a:noFill/>
@@ -23495,7 +23495,7 @@
             <a:r>
               <a:rPr sz="650" b="0">
                 <a:solidFill>
-                  <a:srgbClr val="FAF9F5"/>
+                  <a:srgbClr val="EDF4FB"/>
                 </a:solidFill>
                 <a:latin typeface="Pretendard"/>
                 <a:ea typeface="Pretendard"/>
@@ -23521,7 +23521,7 @@
           </a:prstGeom>
           <a:ln w="15240">
             <a:solidFill>
-              <a:srgbClr val="CC785C"/>
+              <a:srgbClr val="0B6FB3"/>
             </a:solidFill>
             <a:tailEnd type="triangle" w="med" len="med"/>
           </a:ln>
@@ -23559,7 +23559,7 @@
             </a:avLst>
           </a:prstGeom>
           <a:solidFill>
-            <a:srgbClr val="CC785C"/>
+            <a:srgbClr val="0B6FB3"/>
           </a:solidFill>
           <a:ln>
             <a:noFill/>
@@ -23631,7 +23631,7 @@
             <a:r>
               <a:rPr sz="650" b="0">
                 <a:solidFill>
-                  <a:srgbClr val="FAF9F5"/>
+                  <a:srgbClr val="EDF4FB"/>
                 </a:solidFill>
                 <a:latin typeface="Pretendard"/>
                 <a:ea typeface="Pretendard"/>
@@ -23657,7 +23657,7 @@
           </a:prstGeom>
           <a:ln w="15240">
             <a:solidFill>
-              <a:srgbClr val="CC785C"/>
+              <a:srgbClr val="0B6FB3"/>
             </a:solidFill>
             <a:tailEnd type="triangle" w="med" len="med"/>
           </a:ln>
@@ -23695,7 +23695,7 @@
             </a:avLst>
           </a:prstGeom>
           <a:solidFill>
-            <a:srgbClr val="181715"/>
+            <a:srgbClr val="091C4D"/>
           </a:solidFill>
           <a:ln>
             <a:noFill/>
@@ -23754,7 +23754,7 @@
             <a:r>
               <a:rPr sz="850" b="1">
                 <a:solidFill>
-                  <a:srgbClr val="FAF9F5"/>
+                  <a:srgbClr val="EDF4FB"/>
                 </a:solidFill>
                 <a:latin typeface="Pretendard"/>
                 <a:ea typeface="Pretendard"/>
@@ -23767,7 +23767,7 @@
             <a:r>
               <a:rPr sz="650" b="0">
                 <a:solidFill>
-                  <a:srgbClr val="A09D96"/>
+                  <a:srgbClr val="9DB1CE"/>
                 </a:solidFill>
                 <a:latin typeface="Pretendard"/>
                 <a:ea typeface="Pretendard"/>
@@ -23807,7 +23807,7 @@
             <a:r>
               <a:rPr sz="750" b="1">
                 <a:solidFill>
-                  <a:srgbClr val="A9583E"/>
+                  <a:srgbClr val="07569D"/>
                 </a:solidFill>
                 <a:latin typeface="Pretendard"/>
                 <a:ea typeface="Pretendard"/>
@@ -23817,7 +23817,7 @@
             <a:r>
               <a:rPr sz="750" b="0">
                 <a:solidFill>
-                  <a:srgbClr val="6C6A64"/>
+                  <a:srgbClr val="637797"/>
                 </a:solidFill>
                 <a:latin typeface="Pretendard"/>
                 <a:ea typeface="Pretendard"/>
@@ -23857,7 +23857,7 @@
             <a:r>
               <a:rPr sz="1050" b="1">
                 <a:solidFill>
-                  <a:srgbClr val="141413"/>
+                  <a:srgbClr val="0F1F3A"/>
                 </a:solidFill>
                 <a:latin typeface="Pretendard"/>
                 <a:ea typeface="Pretendard"/>
@@ -23884,11 +23884,11 @@
             </a:avLst>
           </a:prstGeom>
           <a:solidFill>
-            <a:srgbClr val="FAF9F5"/>
+            <a:srgbClr val="FFFFFF"/>
           </a:solidFill>
           <a:ln w="9525">
             <a:solidFill>
-              <a:srgbClr val="E6DFD8"/>
+              <a:srgbClr val="D6E3F1"/>
             </a:solidFill>
           </a:ln>
           <a:effectLst/>
@@ -23945,7 +23945,7 @@
             <a:r>
               <a:rPr sz="850" b="1">
                 <a:solidFill>
-                  <a:srgbClr val="A9583E"/>
+                  <a:srgbClr val="07569D"/>
                 </a:solidFill>
                 <a:latin typeface="Pretendard"/>
                 <a:ea typeface="Pretendard"/>
@@ -23985,7 +23985,7 @@
             <a:r>
               <a:rPr sz="750" b="0">
                 <a:solidFill>
-                  <a:srgbClr val="141413"/>
+                  <a:srgbClr val="0F1F3A"/>
                 </a:solidFill>
                 <a:latin typeface="Pretendard"/>
                 <a:ea typeface="Pretendard"/>
@@ -24025,7 +24025,7 @@
             <a:r>
               <a:rPr sz="650" b="0">
                 <a:solidFill>
-                  <a:srgbClr val="6C6A64"/>
+                  <a:srgbClr val="637797"/>
                 </a:solidFill>
                 <a:latin typeface="Pretendard"/>
                 <a:ea typeface="Pretendard"/>
@@ -24052,11 +24052,11 @@
             </a:avLst>
           </a:prstGeom>
           <a:solidFill>
-            <a:srgbClr val="FAF9F5"/>
+            <a:srgbClr val="FFFFFF"/>
           </a:solidFill>
           <a:ln w="9525">
             <a:solidFill>
-              <a:srgbClr val="E6DFD8"/>
+              <a:srgbClr val="D6E3F1"/>
             </a:solidFill>
           </a:ln>
           <a:effectLst/>
@@ -24113,7 +24113,7 @@
             <a:r>
               <a:rPr sz="850" b="1">
                 <a:solidFill>
-                  <a:srgbClr val="A9583E"/>
+                  <a:srgbClr val="07569D"/>
                 </a:solidFill>
                 <a:latin typeface="Pretendard"/>
                 <a:ea typeface="Pretendard"/>
@@ -24153,7 +24153,7 @@
             <a:r>
               <a:rPr sz="750" b="0">
                 <a:solidFill>
-                  <a:srgbClr val="141413"/>
+                  <a:srgbClr val="0F1F3A"/>
                 </a:solidFill>
                 <a:latin typeface="Pretendard"/>
                 <a:ea typeface="Pretendard"/>
@@ -24193,7 +24193,7 @@
             <a:r>
               <a:rPr sz="650" b="0">
                 <a:solidFill>
-                  <a:srgbClr val="6C6A64"/>
+                  <a:srgbClr val="637797"/>
                 </a:solidFill>
                 <a:latin typeface="Pretendard"/>
                 <a:ea typeface="Pretendard"/>
@@ -24220,11 +24220,11 @@
             </a:avLst>
           </a:prstGeom>
           <a:solidFill>
-            <a:srgbClr val="FAF9F5"/>
+            <a:srgbClr val="FFFFFF"/>
           </a:solidFill>
           <a:ln w="9525">
             <a:solidFill>
-              <a:srgbClr val="E6DFD8"/>
+              <a:srgbClr val="D6E3F1"/>
             </a:solidFill>
           </a:ln>
           <a:effectLst/>
@@ -24281,7 +24281,7 @@
             <a:r>
               <a:rPr sz="850" b="1">
                 <a:solidFill>
-                  <a:srgbClr val="A9583E"/>
+                  <a:srgbClr val="07569D"/>
                 </a:solidFill>
                 <a:latin typeface="Pretendard"/>
                 <a:ea typeface="Pretendard"/>
@@ -24321,7 +24321,7 @@
             <a:r>
               <a:rPr sz="750" b="0">
                 <a:solidFill>
-                  <a:srgbClr val="141413"/>
+                  <a:srgbClr val="0F1F3A"/>
                 </a:solidFill>
                 <a:latin typeface="Pretendard"/>
                 <a:ea typeface="Pretendard"/>
@@ -24361,7 +24361,7 @@
             <a:r>
               <a:rPr sz="650" b="0">
                 <a:solidFill>
-                  <a:srgbClr val="6C6A64"/>
+                  <a:srgbClr val="637797"/>
                 </a:solidFill>
                 <a:latin typeface="Pretendard"/>
                 <a:ea typeface="Pretendard"/>
@@ -24388,11 +24388,11 @@
             </a:avLst>
           </a:prstGeom>
           <a:solidFill>
-            <a:srgbClr val="FAF9F5"/>
+            <a:srgbClr val="FFFFFF"/>
           </a:solidFill>
           <a:ln w="9525">
             <a:solidFill>
-              <a:srgbClr val="E6DFD8"/>
+              <a:srgbClr val="D6E3F1"/>
             </a:solidFill>
           </a:ln>
           <a:effectLst/>
@@ -24449,7 +24449,7 @@
             <a:r>
               <a:rPr sz="850" b="1">
                 <a:solidFill>
-                  <a:srgbClr val="A9583E"/>
+                  <a:srgbClr val="07569D"/>
                 </a:solidFill>
                 <a:latin typeface="Pretendard"/>
                 <a:ea typeface="Pretendard"/>
@@ -24489,7 +24489,7 @@
             <a:r>
               <a:rPr sz="750" b="0">
                 <a:solidFill>
-                  <a:srgbClr val="141413"/>
+                  <a:srgbClr val="0F1F3A"/>
                 </a:solidFill>
                 <a:latin typeface="Pretendard"/>
                 <a:ea typeface="Pretendard"/>
@@ -24529,7 +24529,7 @@
             <a:r>
               <a:rPr sz="650" b="0">
                 <a:solidFill>
-                  <a:srgbClr val="6C6A64"/>
+                  <a:srgbClr val="637797"/>
                 </a:solidFill>
                 <a:latin typeface="Pretendard"/>
                 <a:ea typeface="Pretendard"/>
@@ -24569,7 +24569,7 @@
             <a:r>
               <a:rPr sz="1050" b="1">
                 <a:solidFill>
-                  <a:srgbClr val="141413"/>
+                  <a:srgbClr val="0F1F3A"/>
                 </a:solidFill>
                 <a:latin typeface="Pretendard"/>
                 <a:ea typeface="Pretendard"/>
@@ -24596,7 +24596,7 @@
             </a:avLst>
           </a:prstGeom>
           <a:solidFill>
-            <a:srgbClr val="181715"/>
+            <a:srgbClr val="091C4D"/>
           </a:solidFill>
           <a:ln>
             <a:noFill/>
@@ -24655,7 +24655,7 @@
             <a:r>
               <a:rPr sz="850" b="1">
                 <a:solidFill>
-                  <a:srgbClr val="E8A55A"/>
+                  <a:srgbClr val="1CA9D6"/>
                 </a:solidFill>
                 <a:latin typeface="Pretendard"/>
                 <a:ea typeface="Pretendard"/>
@@ -24695,7 +24695,7 @@
             <a:r>
               <a:rPr sz="750" b="0">
                 <a:solidFill>
-                  <a:srgbClr val="A09D96"/>
+                  <a:srgbClr val="9DB1CE"/>
                 </a:solidFill>
                 <a:latin typeface="Pretendard"/>
                 <a:ea typeface="Pretendard"/>
@@ -24735,7 +24735,7 @@
             <a:r>
               <a:rPr sz="750" b="0">
                 <a:solidFill>
-                  <a:srgbClr val="A09D96"/>
+                  <a:srgbClr val="9DB1CE"/>
                 </a:solidFill>
                 <a:latin typeface="Pretendard"/>
                 <a:ea typeface="Pretendard"/>
@@ -24775,7 +24775,7 @@
             <a:r>
               <a:rPr sz="750" b="0">
                 <a:solidFill>
-                  <a:srgbClr val="A09D96"/>
+                  <a:srgbClr val="9DB1CE"/>
                 </a:solidFill>
                 <a:latin typeface="Pretendard"/>
                 <a:ea typeface="Pretendard"/>
@@ -24815,7 +24815,7 @@
             <a:r>
               <a:rPr sz="850" b="1">
                 <a:solidFill>
-                  <a:srgbClr val="E8A55A"/>
+                  <a:srgbClr val="1CA9D6"/>
                 </a:solidFill>
                 <a:latin typeface="Pretendard"/>
                 <a:ea typeface="Pretendard"/>
@@ -24855,7 +24855,7 @@
             <a:r>
               <a:rPr sz="750" b="0">
                 <a:solidFill>
-                  <a:srgbClr val="A09D96"/>
+                  <a:srgbClr val="9DB1CE"/>
                 </a:solidFill>
                 <a:latin typeface="Pretendard"/>
                 <a:ea typeface="Pretendard"/>
@@ -24895,7 +24895,7 @@
             <a:r>
               <a:rPr sz="750" b="0">
                 <a:solidFill>
-                  <a:srgbClr val="A09D96"/>
+                  <a:srgbClr val="9DB1CE"/>
                 </a:solidFill>
                 <a:latin typeface="Pretendard"/>
                 <a:ea typeface="Pretendard"/>
@@ -24935,7 +24935,7 @@
             <a:r>
               <a:rPr sz="750" b="0">
                 <a:solidFill>
-                  <a:srgbClr val="A09D96"/>
+                  <a:srgbClr val="9DB1CE"/>
                 </a:solidFill>
                 <a:latin typeface="Pretendard"/>
                 <a:ea typeface="Pretendard"/>
@@ -24975,7 +24975,7 @@
             <a:r>
               <a:rPr sz="750" b="0">
                 <a:solidFill>
-                  <a:srgbClr val="A09D96"/>
+                  <a:srgbClr val="9DB1CE"/>
                 </a:solidFill>
                 <a:latin typeface="Pretendard"/>
                 <a:ea typeface="Pretendard"/>
@@ -25802,7 +25802,7 @@
             <a:r>
               <a:rPr sz="1100" b="1">
                 <a:solidFill>
-                  <a:srgbClr val="141413"/>
+                  <a:srgbClr val="0F1F3A"/>
                 </a:solidFill>
                 <a:latin typeface="Pretendard"/>
                 <a:ea typeface="Pretendard"/>
@@ -25812,7 +25812,7 @@
             <a:r>
               <a:rPr sz="900" b="0">
                 <a:solidFill>
-                  <a:srgbClr val="6C6A64"/>
+                  <a:srgbClr val="637797"/>
                 </a:solidFill>
                 <a:latin typeface="Pretendard"/>
                 <a:ea typeface="Pretendard"/>
@@ -25839,11 +25839,11 @@
             </a:avLst>
           </a:prstGeom>
           <a:solidFill>
-            <a:srgbClr val="EFE9DE"/>
+            <a:srgbClr val="EDF7FF"/>
           </a:solidFill>
           <a:ln w="9525">
             <a:solidFill>
-              <a:srgbClr val="E6DFD8"/>
+              <a:srgbClr val="D6E3F1"/>
             </a:solidFill>
           </a:ln>
           <a:effectLst/>
@@ -25870,7 +25870,7 @@
             <a:r>
               <a:rPr sz="750" b="1">
                 <a:solidFill>
-                  <a:srgbClr val="141413"/>
+                  <a:srgbClr val="0F1F3A"/>
                 </a:solidFill>
                 <a:latin typeface="Pretendard"/>
                 <a:ea typeface="Pretendard"/>
@@ -25953,7 +25953,7 @@
             </a:avLst>
           </a:prstGeom>
           <a:solidFill>
-            <a:srgbClr val="181715"/>
+            <a:srgbClr val="091C4D"/>
           </a:solidFill>
           <a:ln>
             <a:noFill/>
@@ -25982,7 +25982,7 @@
             <a:r>
               <a:rPr sz="750" b="1">
                 <a:solidFill>
-                  <a:srgbClr val="FAF9F5"/>
+                  <a:srgbClr val="EDF4FB"/>
                 </a:solidFill>
                 <a:latin typeface="Pretendard"/>
                 <a:ea typeface="Pretendard"/>
@@ -26009,7 +26009,7 @@
             </a:avLst>
           </a:prstGeom>
           <a:solidFill>
-            <a:srgbClr val="CC785C"/>
+            <a:srgbClr val="0B6FB3"/>
           </a:solidFill>
           <a:ln>
             <a:noFill/>
@@ -26065,11 +26065,11 @@
             </a:avLst>
           </a:prstGeom>
           <a:solidFill>
-            <a:srgbClr val="EFE9DE"/>
+            <a:srgbClr val="EDF7FF"/>
           </a:solidFill>
           <a:ln w="9525">
             <a:solidFill>
-              <a:srgbClr val="E6DFD8"/>
+              <a:srgbClr val="D6E3F1"/>
             </a:solidFill>
           </a:ln>
           <a:effectLst/>
@@ -26126,7 +26126,7 @@
             <a:r>
               <a:rPr sz="1000" b="1">
                 <a:solidFill>
-                  <a:srgbClr val="141413"/>
+                  <a:srgbClr val="0F1F3A"/>
                 </a:solidFill>
                 <a:latin typeface="Pretendard"/>
                 <a:ea typeface="Pretendard"/>
@@ -26166,7 +26166,7 @@
             <a:r>
               <a:rPr sz="800" b="1">
                 <a:solidFill>
-                  <a:srgbClr val="141413"/>
+                  <a:srgbClr val="0F1F3A"/>
                 </a:solidFill>
                 <a:latin typeface="Pretendard"/>
                 <a:ea typeface="Pretendard"/>
@@ -26183,7 +26183,7 @@
             <a:r>
               <a:rPr sz="800" b="1">
                 <a:solidFill>
-                  <a:srgbClr val="141413"/>
+                  <a:srgbClr val="0F1F3A"/>
                 </a:solidFill>
                 <a:latin typeface="Pretendard"/>
                 <a:ea typeface="Pretendard"/>
@@ -26209,7 +26209,7 @@
           </a:prstGeom>
           <a:ln w="13970">
             <a:solidFill>
-              <a:srgbClr val="CC785C"/>
+              <a:srgbClr val="0B6FB3"/>
             </a:solidFill>
             <a:tailEnd type="triangle" w="med" len="med"/>
           </a:ln>
@@ -26389,7 +26389,7 @@
           </a:prstGeom>
           <a:ln w="13970">
             <a:solidFill>
-              <a:srgbClr val="CC785C"/>
+              <a:srgbClr val="0B6FB3"/>
             </a:solidFill>
             <a:tailEnd type="triangle" w="med" len="med"/>
           </a:ln>
@@ -26427,7 +26427,7 @@
             </a:avLst>
           </a:prstGeom>
           <a:solidFill>
-            <a:srgbClr val="181715"/>
+            <a:srgbClr val="091C4D"/>
           </a:solidFill>
           <a:ln>
             <a:noFill/>
@@ -26486,7 +26486,7 @@
             <a:r>
               <a:rPr sz="1000" b="1">
                 <a:solidFill>
-                  <a:srgbClr val="FAF9F5"/>
+                  <a:srgbClr val="EDF4FB"/>
                 </a:solidFill>
                 <a:latin typeface="Pretendard"/>
                 <a:ea typeface="Pretendard"/>
@@ -26526,7 +26526,7 @@
             <a:r>
               <a:rPr sz="800" b="1">
                 <a:solidFill>
-                  <a:srgbClr val="FAF9F5"/>
+                  <a:srgbClr val="EDF4FB"/>
                 </a:solidFill>
                 <a:latin typeface="Pretendard"/>
                 <a:ea typeface="Pretendard"/>
@@ -26543,7 +26543,7 @@
             <a:r>
               <a:rPr sz="800" b="1">
                 <a:solidFill>
-                  <a:srgbClr val="FAF9F5"/>
+                  <a:srgbClr val="EDF4FB"/>
                 </a:solidFill>
                 <a:latin typeface="Pretendard"/>
                 <a:ea typeface="Pretendard"/>
@@ -26569,7 +26569,7 @@
           </a:prstGeom>
           <a:ln w="13970">
             <a:solidFill>
-              <a:srgbClr val="CC785C"/>
+              <a:srgbClr val="0B6FB3"/>
             </a:solidFill>
             <a:tailEnd type="triangle" w="med" len="med"/>
           </a:ln>
@@ -26607,7 +26607,7 @@
             </a:avLst>
           </a:prstGeom>
           <a:solidFill>
-            <a:srgbClr val="181715"/>
+            <a:srgbClr val="091C4D"/>
           </a:solidFill>
           <a:ln>
             <a:noFill/>
@@ -26666,7 +26666,7 @@
             <a:r>
               <a:rPr sz="1000" b="1">
                 <a:solidFill>
-                  <a:srgbClr val="FAF9F5"/>
+                  <a:srgbClr val="EDF4FB"/>
                 </a:solidFill>
                 <a:latin typeface="Pretendard"/>
                 <a:ea typeface="Pretendard"/>
@@ -26706,7 +26706,7 @@
             <a:r>
               <a:rPr sz="800" b="1">
                 <a:solidFill>
-                  <a:srgbClr val="FAF9F5"/>
+                  <a:srgbClr val="EDF4FB"/>
                 </a:solidFill>
                 <a:latin typeface="Pretendard"/>
                 <a:ea typeface="Pretendard"/>
@@ -26723,7 +26723,7 @@
             <a:r>
               <a:rPr sz="800" b="1">
                 <a:solidFill>
-                  <a:srgbClr val="FAF9F5"/>
+                  <a:srgbClr val="EDF4FB"/>
                 </a:solidFill>
                 <a:latin typeface="Pretendard"/>
                 <a:ea typeface="Pretendard"/>
@@ -26749,7 +26749,7 @@
           </a:prstGeom>
           <a:ln w="13970">
             <a:solidFill>
-              <a:srgbClr val="CC785C"/>
+              <a:srgbClr val="0B6FB3"/>
             </a:solidFill>
             <a:tailEnd type="triangle" w="med" len="med"/>
           </a:ln>
@@ -26787,7 +26787,7 @@
             </a:avLst>
           </a:prstGeom>
           <a:solidFill>
-            <a:srgbClr val="CC785C"/>
+            <a:srgbClr val="0B6FB3"/>
           </a:solidFill>
           <a:ln>
             <a:noFill/>
@@ -26929,7 +26929,7 @@
           </a:prstGeom>
           <a:ln w="13970">
             <a:solidFill>
-              <a:srgbClr val="CC785C"/>
+              <a:srgbClr val="0B6FB3"/>
             </a:solidFill>
             <a:tailEnd type="triangle" w="med" len="med"/>
           </a:ln>
@@ -27109,7 +27109,7 @@
           </a:prstGeom>
           <a:ln w="13970">
             <a:solidFill>
-              <a:srgbClr val="CC785C"/>
+              <a:srgbClr val="0B6FB3"/>
             </a:solidFill>
             <a:tailEnd type="triangle" w="med" len="med"/>
           </a:ln>
@@ -27147,11 +27147,11 @@
             </a:avLst>
           </a:prstGeom>
           <a:solidFill>
-            <a:srgbClr val="EFE9DE"/>
+            <a:srgbClr val="EDF7FF"/>
           </a:solidFill>
           <a:ln w="9525">
             <a:solidFill>
-              <a:srgbClr val="E6DFD8"/>
+              <a:srgbClr val="D6E3F1"/>
             </a:solidFill>
           </a:ln>
           <a:effectLst/>
@@ -27208,7 +27208,7 @@
             <a:r>
               <a:rPr sz="1000" b="1">
                 <a:solidFill>
-                  <a:srgbClr val="141413"/>
+                  <a:srgbClr val="0F1F3A"/>
                 </a:solidFill>
                 <a:latin typeface="Pretendard"/>
                 <a:ea typeface="Pretendard"/>
@@ -27248,7 +27248,7 @@
             <a:r>
               <a:rPr sz="800" b="1">
                 <a:solidFill>
-                  <a:srgbClr val="141413"/>
+                  <a:srgbClr val="0F1F3A"/>
                 </a:solidFill>
                 <a:latin typeface="Pretendard"/>
                 <a:ea typeface="Pretendard"/>
@@ -27265,7 +27265,7 @@
             <a:r>
               <a:rPr sz="800" b="1">
                 <a:solidFill>
-                  <a:srgbClr val="141413"/>
+                  <a:srgbClr val="0F1F3A"/>
                 </a:solidFill>
                 <a:latin typeface="Pretendard"/>
                 <a:ea typeface="Pretendard"/>
@@ -27305,7 +27305,7 @@
             <a:r>
               <a:rPr sz="800" b="1">
                 <a:solidFill>
-                  <a:srgbClr val="A9583E"/>
+                  <a:srgbClr val="07569D"/>
                 </a:solidFill>
                 <a:latin typeface="Pretendard"/>
                 <a:ea typeface="Pretendard"/>
@@ -27315,7 +27315,7 @@
             <a:r>
               <a:rPr sz="800" b="0">
                 <a:solidFill>
-                  <a:srgbClr val="6C6A64"/>
+                  <a:srgbClr val="637797"/>
                 </a:solidFill>
                 <a:latin typeface="Pretendard"/>
                 <a:ea typeface="Pretendard"/>
@@ -27349,7 +27349,7 @@
           </a:prstGeom>
           <a:ln w="12700">
             <a:solidFill>
-              <a:srgbClr val="E6DFD8"/>
+              <a:srgbClr val="D6E3F1"/>
             </a:solidFill>
           </a:ln>
           <a:effectLst/>
@@ -27385,7 +27385,7 @@
             <a:r>
               <a:rPr sz="750" b="0">
                 <a:solidFill>
-                  <a:srgbClr val="6C6A64"/>
+                  <a:srgbClr val="637797"/>
                 </a:solidFill>
                 <a:latin typeface="Pretendard"/>
                 <a:ea typeface="Pretendard"/>
@@ -27419,7 +27419,7 @@
           </a:prstGeom>
           <a:ln w="12700">
             <a:solidFill>
-              <a:srgbClr val="E6DFD8"/>
+              <a:srgbClr val="D6E3F1"/>
             </a:solidFill>
           </a:ln>
           <a:effectLst/>
@@ -27455,7 +27455,7 @@
             <a:r>
               <a:rPr sz="750" b="0">
                 <a:solidFill>
-                  <a:srgbClr val="6C6A64"/>
+                  <a:srgbClr val="637797"/>
                 </a:solidFill>
                 <a:latin typeface="Pretendard"/>
                 <a:ea typeface="Pretendard"/>
@@ -27482,11 +27482,11 @@
             </a:avLst>
           </a:prstGeom>
           <a:solidFill>
-            <a:srgbClr val="F5F0E8"/>
+            <a:srgbClr val="F6F9FD"/>
           </a:solidFill>
           <a:ln w="9525">
             <a:solidFill>
-              <a:srgbClr val="E6DFD8"/>
+              <a:srgbClr val="D6E3F1"/>
             </a:solidFill>
           </a:ln>
           <a:effectLst/>
@@ -27543,7 +27543,7 @@
             <a:r>
               <a:rPr sz="900" b="1">
                 <a:solidFill>
-                  <a:srgbClr val="141413"/>
+                  <a:srgbClr val="0F1F3A"/>
                 </a:solidFill>
                 <a:latin typeface="Pretendard"/>
                 <a:ea typeface="Pretendard"/>
@@ -27583,7 +27583,7 @@
             <a:r>
               <a:rPr sz="800" b="1">
                 <a:solidFill>
-                  <a:srgbClr val="A9583E"/>
+                  <a:srgbClr val="07569D"/>
                 </a:solidFill>
                 <a:latin typeface="Pretendard"/>
                 <a:ea typeface="Pretendard"/>
@@ -27593,7 +27593,7 @@
             <a:r>
               <a:rPr sz="800" b="0">
                 <a:solidFill>
-                  <a:srgbClr val="141413"/>
+                  <a:srgbClr val="0F1F3A"/>
                 </a:solidFill>
                 <a:latin typeface="Pretendard"/>
                 <a:ea typeface="Pretendard"/>
@@ -27633,7 +27633,7 @@
             <a:r>
               <a:rPr sz="800" b="1">
                 <a:solidFill>
-                  <a:srgbClr val="A9583E"/>
+                  <a:srgbClr val="07569D"/>
                 </a:solidFill>
                 <a:latin typeface="Pretendard"/>
                 <a:ea typeface="Pretendard"/>
@@ -27643,7 +27643,7 @@
             <a:r>
               <a:rPr sz="800" b="0">
                 <a:solidFill>
-                  <a:srgbClr val="141413"/>
+                  <a:srgbClr val="0F1F3A"/>
                 </a:solidFill>
                 <a:latin typeface="Pretendard"/>
                 <a:ea typeface="Pretendard"/>
@@ -27683,7 +27683,7 @@
             <a:r>
               <a:rPr sz="800" b="1">
                 <a:solidFill>
-                  <a:srgbClr val="A9583E"/>
+                  <a:srgbClr val="07569D"/>
                 </a:solidFill>
                 <a:latin typeface="Pretendard"/>
                 <a:ea typeface="Pretendard"/>
@@ -27693,7 +27693,7 @@
             <a:r>
               <a:rPr sz="800" b="0">
                 <a:solidFill>
-                  <a:srgbClr val="141413"/>
+                  <a:srgbClr val="0F1F3A"/>
                 </a:solidFill>
                 <a:latin typeface="Pretendard"/>
                 <a:ea typeface="Pretendard"/>
@@ -27733,7 +27733,7 @@
             <a:r>
               <a:rPr sz="800" b="1">
                 <a:solidFill>
-                  <a:srgbClr val="A9583E"/>
+                  <a:srgbClr val="07569D"/>
                 </a:solidFill>
                 <a:latin typeface="Pretendard"/>
                 <a:ea typeface="Pretendard"/>
@@ -27743,7 +27743,7 @@
             <a:r>
               <a:rPr sz="800" b="0">
                 <a:solidFill>
-                  <a:srgbClr val="141413"/>
+                  <a:srgbClr val="0F1F3A"/>
                 </a:solidFill>
                 <a:latin typeface="Pretendard"/>
                 <a:ea typeface="Pretendard"/>
@@ -28500,11 +28500,11 @@
             </a:avLst>
           </a:prstGeom>
           <a:solidFill>
-            <a:srgbClr val="EFE9DE"/>
+            <a:srgbClr val="EDF7FF"/>
           </a:solidFill>
           <a:ln w="9525">
             <a:solidFill>
-              <a:srgbClr val="E6DFD8"/>
+              <a:srgbClr val="D6E3F1"/>
             </a:solidFill>
           </a:ln>
           <a:effectLst/>
@@ -28548,7 +28548,7 @@
             </a:avLst>
           </a:prstGeom>
           <a:solidFill>
-            <a:srgbClr val="CC785C"/>
+            <a:srgbClr val="0B6FB3"/>
           </a:solidFill>
           <a:ln>
             <a:noFill/>
@@ -28607,7 +28607,7 @@
             <a:r>
               <a:rPr sz="1700" b="1">
                 <a:solidFill>
-                  <a:srgbClr val="A9583E"/>
+                  <a:srgbClr val="07569D"/>
                 </a:solidFill>
                 <a:latin typeface="Pretendard"/>
                 <a:ea typeface="Pretendard"/>
@@ -28647,7 +28647,7 @@
             <a:r>
               <a:rPr sz="850" b="1">
                 <a:solidFill>
-                  <a:srgbClr val="141413"/>
+                  <a:srgbClr val="0F1F3A"/>
                 </a:solidFill>
                 <a:latin typeface="Pretendard"/>
                 <a:ea typeface="Pretendard"/>
@@ -28687,7 +28687,7 @@
             <a:r>
               <a:rPr sz="750" b="0">
                 <a:solidFill>
-                  <a:srgbClr val="6C6A64"/>
+                  <a:srgbClr val="637797"/>
                 </a:solidFill>
                 <a:latin typeface="Pretendard"/>
                 <a:ea typeface="Pretendard"/>
@@ -28714,11 +28714,11 @@
             </a:avLst>
           </a:prstGeom>
           <a:solidFill>
-            <a:srgbClr val="EFE9DE"/>
+            <a:srgbClr val="EDF7FF"/>
           </a:solidFill>
           <a:ln w="9525">
             <a:solidFill>
-              <a:srgbClr val="E6DFD8"/>
+              <a:srgbClr val="D6E3F1"/>
             </a:solidFill>
           </a:ln>
           <a:effectLst/>
@@ -28762,7 +28762,7 @@
             </a:avLst>
           </a:prstGeom>
           <a:solidFill>
-            <a:srgbClr val="CC785C"/>
+            <a:srgbClr val="0B6FB3"/>
           </a:solidFill>
           <a:ln>
             <a:noFill/>
@@ -28821,7 +28821,7 @@
             <a:r>
               <a:rPr sz="1700" b="1">
                 <a:solidFill>
-                  <a:srgbClr val="A9583E"/>
+                  <a:srgbClr val="07569D"/>
                 </a:solidFill>
                 <a:latin typeface="Pretendard"/>
                 <a:ea typeface="Pretendard"/>
@@ -28861,7 +28861,7 @@
             <a:r>
               <a:rPr sz="850" b="1">
                 <a:solidFill>
-                  <a:srgbClr val="141413"/>
+                  <a:srgbClr val="0F1F3A"/>
                 </a:solidFill>
                 <a:latin typeface="Pretendard"/>
                 <a:ea typeface="Pretendard"/>
@@ -28901,7 +28901,7 @@
             <a:r>
               <a:rPr sz="750" b="0">
                 <a:solidFill>
-                  <a:srgbClr val="6C6A64"/>
+                  <a:srgbClr val="637797"/>
                 </a:solidFill>
                 <a:latin typeface="Pretendard"/>
                 <a:ea typeface="Pretendard"/>
@@ -28928,11 +28928,11 @@
             </a:avLst>
           </a:prstGeom>
           <a:solidFill>
-            <a:srgbClr val="EFE9DE"/>
+            <a:srgbClr val="EDF7FF"/>
           </a:solidFill>
           <a:ln w="9525">
             <a:solidFill>
-              <a:srgbClr val="E6DFD8"/>
+              <a:srgbClr val="D6E3F1"/>
             </a:solidFill>
           </a:ln>
           <a:effectLst/>
@@ -28976,7 +28976,7 @@
             </a:avLst>
           </a:prstGeom>
           <a:solidFill>
-            <a:srgbClr val="CC785C"/>
+            <a:srgbClr val="0B6FB3"/>
           </a:solidFill>
           <a:ln>
             <a:noFill/>
@@ -29035,7 +29035,7 @@
             <a:r>
               <a:rPr sz="1700" b="1">
                 <a:solidFill>
-                  <a:srgbClr val="A9583E"/>
+                  <a:srgbClr val="07569D"/>
                 </a:solidFill>
                 <a:latin typeface="Pretendard"/>
                 <a:ea typeface="Pretendard"/>
@@ -29075,7 +29075,7 @@
             <a:r>
               <a:rPr sz="850" b="1">
                 <a:solidFill>
-                  <a:srgbClr val="141413"/>
+                  <a:srgbClr val="0F1F3A"/>
                 </a:solidFill>
                 <a:latin typeface="Pretendard"/>
                 <a:ea typeface="Pretendard"/>
@@ -29115,7 +29115,7 @@
             <a:r>
               <a:rPr sz="750" b="0">
                 <a:solidFill>
-                  <a:srgbClr val="6C6A64"/>
+                  <a:srgbClr val="637797"/>
                 </a:solidFill>
                 <a:latin typeface="Pretendard"/>
                 <a:ea typeface="Pretendard"/>
@@ -29142,11 +29142,11 @@
             </a:avLst>
           </a:prstGeom>
           <a:solidFill>
-            <a:srgbClr val="EFE9DE"/>
+            <a:srgbClr val="EDF7FF"/>
           </a:solidFill>
           <a:ln w="9525">
             <a:solidFill>
-              <a:srgbClr val="E6DFD8"/>
+              <a:srgbClr val="D6E3F1"/>
             </a:solidFill>
           </a:ln>
           <a:effectLst/>
@@ -29190,7 +29190,7 @@
             </a:avLst>
           </a:prstGeom>
           <a:solidFill>
-            <a:srgbClr val="CC785C"/>
+            <a:srgbClr val="0B6FB3"/>
           </a:solidFill>
           <a:ln>
             <a:noFill/>
@@ -29249,7 +29249,7 @@
             <a:r>
               <a:rPr sz="1700" b="1">
                 <a:solidFill>
-                  <a:srgbClr val="A9583E"/>
+                  <a:srgbClr val="07569D"/>
                 </a:solidFill>
                 <a:latin typeface="Pretendard"/>
                 <a:ea typeface="Pretendard"/>
@@ -29289,7 +29289,7 @@
             <a:r>
               <a:rPr sz="850" b="1">
                 <a:solidFill>
-                  <a:srgbClr val="141413"/>
+                  <a:srgbClr val="0F1F3A"/>
                 </a:solidFill>
                 <a:latin typeface="Pretendard"/>
                 <a:ea typeface="Pretendard"/>
@@ -29329,7 +29329,7 @@
             <a:r>
               <a:rPr sz="750" b="0">
                 <a:solidFill>
-                  <a:srgbClr val="6C6A64"/>
+                  <a:srgbClr val="637797"/>
                 </a:solidFill>
                 <a:latin typeface="Pretendard"/>
                 <a:ea typeface="Pretendard"/>
@@ -29369,7 +29369,7 @@
             <a:r>
               <a:rPr sz="750" b="0">
                 <a:solidFill>
-                  <a:srgbClr val="6C6A64"/>
+                  <a:srgbClr val="637797"/>
                 </a:solidFill>
                 <a:latin typeface="Pretendard"/>
                 <a:ea typeface="Pretendard"/>
@@ -29409,7 +29409,7 @@
             <a:r>
               <a:rPr sz="1100" b="1">
                 <a:solidFill>
-                  <a:srgbClr val="141413"/>
+                  <a:srgbClr val="0F1F3A"/>
                 </a:solidFill>
                 <a:latin typeface="Pretendard"/>
                 <a:ea typeface="Pretendard"/>
@@ -29436,11 +29436,11 @@
             </a:avLst>
           </a:prstGeom>
           <a:solidFill>
-            <a:srgbClr val="FAF9F5"/>
+            <a:srgbClr val="FFFFFF"/>
           </a:solidFill>
           <a:ln w="9525">
             <a:solidFill>
-              <a:srgbClr val="E6DFD8"/>
+              <a:srgbClr val="D6E3F1"/>
             </a:solidFill>
           </a:ln>
           <a:effectLst/>
@@ -29484,7 +29484,7 @@
             </a:avLst>
           </a:prstGeom>
           <a:solidFill>
-            <a:srgbClr val="5DB872"/>
+            <a:srgbClr val="0F8F72"/>
           </a:solidFill>
           <a:ln>
             <a:noFill/>
@@ -29583,7 +29583,7 @@
             <a:r>
               <a:rPr sz="750" b="0">
                 <a:solidFill>
-                  <a:srgbClr val="141413"/>
+                  <a:srgbClr val="0F1F3A"/>
                 </a:solidFill>
                 <a:latin typeface="Pretendard"/>
                 <a:ea typeface="Pretendard"/>
@@ -29600,7 +29600,7 @@
             <a:r>
               <a:rPr sz="750" b="0">
                 <a:solidFill>
-                  <a:srgbClr val="141413"/>
+                  <a:srgbClr val="0F1F3A"/>
                 </a:solidFill>
                 <a:latin typeface="Pretendard"/>
                 <a:ea typeface="Pretendard"/>
@@ -29626,7 +29626,7 @@
           </a:prstGeom>
           <a:ln w="13970">
             <a:solidFill>
-              <a:srgbClr val="CC785C"/>
+              <a:srgbClr val="0B6FB3"/>
             </a:solidFill>
             <a:tailEnd type="triangle" w="med" len="med"/>
           </a:ln>
@@ -29664,11 +29664,11 @@
             </a:avLst>
           </a:prstGeom>
           <a:solidFill>
-            <a:srgbClr val="FAF9F5"/>
+            <a:srgbClr val="FFFFFF"/>
           </a:solidFill>
           <a:ln w="9525">
             <a:solidFill>
-              <a:srgbClr val="E6DFD8"/>
+              <a:srgbClr val="D6E3F1"/>
             </a:solidFill>
           </a:ln>
           <a:effectLst/>
@@ -29712,7 +29712,7 @@
             </a:avLst>
           </a:prstGeom>
           <a:solidFill>
-            <a:srgbClr val="CC785C"/>
+            <a:srgbClr val="0B6FB3"/>
           </a:solidFill>
           <a:ln>
             <a:noFill/>
@@ -29811,7 +29811,7 @@
             <a:r>
               <a:rPr sz="750" b="0">
                 <a:solidFill>
-                  <a:srgbClr val="141413"/>
+                  <a:srgbClr val="0F1F3A"/>
                 </a:solidFill>
                 <a:latin typeface="Pretendard"/>
                 <a:ea typeface="Pretendard"/>
@@ -29828,7 +29828,7 @@
             <a:r>
               <a:rPr sz="750" b="0">
                 <a:solidFill>
-                  <a:srgbClr val="141413"/>
+                  <a:srgbClr val="0F1F3A"/>
                 </a:solidFill>
                 <a:latin typeface="Pretendard"/>
                 <a:ea typeface="Pretendard"/>
@@ -29854,7 +29854,7 @@
           </a:prstGeom>
           <a:ln w="13970">
             <a:solidFill>
-              <a:srgbClr val="CC785C"/>
+              <a:srgbClr val="0B6FB3"/>
             </a:solidFill>
             <a:tailEnd type="triangle" w="med" len="med"/>
           </a:ln>
@@ -29892,11 +29892,11 @@
             </a:avLst>
           </a:prstGeom>
           <a:solidFill>
-            <a:srgbClr val="FAF9F5"/>
+            <a:srgbClr val="FFFFFF"/>
           </a:solidFill>
           <a:ln w="9525">
             <a:solidFill>
-              <a:srgbClr val="E6DFD8"/>
+              <a:srgbClr val="D6E3F1"/>
             </a:solidFill>
           </a:ln>
           <a:effectLst/>
@@ -30039,7 +30039,7 @@
             <a:r>
               <a:rPr sz="750" b="0">
                 <a:solidFill>
-                  <a:srgbClr val="141413"/>
+                  <a:srgbClr val="0F1F3A"/>
                 </a:solidFill>
                 <a:latin typeface="Pretendard"/>
                 <a:ea typeface="Pretendard"/>
@@ -30056,7 +30056,7 @@
             <a:r>
               <a:rPr sz="750" b="0">
                 <a:solidFill>
-                  <a:srgbClr val="141413"/>
+                  <a:srgbClr val="0F1F3A"/>
                 </a:solidFill>
                 <a:latin typeface="Pretendard"/>
                 <a:ea typeface="Pretendard"/>
@@ -30082,7 +30082,7 @@
           </a:prstGeom>
           <a:ln w="13970">
             <a:solidFill>
-              <a:srgbClr val="CC785C"/>
+              <a:srgbClr val="0B6FB3"/>
             </a:solidFill>
             <a:tailEnd type="triangle" w="med" len="med"/>
           </a:ln>
@@ -30120,11 +30120,11 @@
             </a:avLst>
           </a:prstGeom>
           <a:solidFill>
-            <a:srgbClr val="FAF9F5"/>
+            <a:srgbClr val="FFFFFF"/>
           </a:solidFill>
           <a:ln w="9525">
             <a:solidFill>
-              <a:srgbClr val="E6DFD8"/>
+              <a:srgbClr val="D6E3F1"/>
             </a:solidFill>
           </a:ln>
           <a:effectLst/>
@@ -30168,7 +30168,7 @@
             </a:avLst>
           </a:prstGeom>
           <a:solidFill>
-            <a:srgbClr val="181715"/>
+            <a:srgbClr val="091C4D"/>
           </a:solidFill>
           <a:ln>
             <a:noFill/>
@@ -30267,7 +30267,7 @@
             <a:r>
               <a:rPr sz="750" b="0">
                 <a:solidFill>
-                  <a:srgbClr val="141413"/>
+                  <a:srgbClr val="0F1F3A"/>
                 </a:solidFill>
                 <a:latin typeface="Pretendard"/>
                 <a:ea typeface="Pretendard"/>
@@ -30284,7 +30284,7 @@
             <a:r>
               <a:rPr sz="750" b="0">
                 <a:solidFill>
-                  <a:srgbClr val="141413"/>
+                  <a:srgbClr val="0F1F3A"/>
                 </a:solidFill>
                 <a:latin typeface="Pretendard"/>
                 <a:ea typeface="Pretendard"/>
@@ -30324,7 +30324,7 @@
             <a:r>
               <a:rPr sz="1100" b="1">
                 <a:solidFill>
-                  <a:srgbClr val="141413"/>
+                  <a:srgbClr val="0F1F3A"/>
                 </a:solidFill>
                 <a:latin typeface="Pretendard"/>
                 <a:ea typeface="Pretendard"/>
@@ -30364,7 +30364,7 @@
             <a:r>
               <a:rPr sz="800" b="1">
                 <a:solidFill>
-                  <a:srgbClr val="141413"/>
+                  <a:srgbClr val="0F1F3A"/>
                 </a:solidFill>
                 <a:latin typeface="Pretendard"/>
                 <a:ea typeface="Pretendard"/>
@@ -30374,7 +30374,7 @@
             <a:r>
               <a:rPr sz="800" b="0">
                 <a:solidFill>
-                  <a:srgbClr val="6C6A64"/>
+                  <a:srgbClr val="637797"/>
                 </a:solidFill>
                 <a:latin typeface="Pretendard"/>
                 <a:ea typeface="Pretendard"/>
@@ -30414,7 +30414,7 @@
             <a:r>
               <a:rPr sz="800" b="1">
                 <a:solidFill>
-                  <a:srgbClr val="141413"/>
+                  <a:srgbClr val="0F1F3A"/>
                 </a:solidFill>
                 <a:latin typeface="Pretendard"/>
                 <a:ea typeface="Pretendard"/>
@@ -30424,7 +30424,7 @@
             <a:r>
               <a:rPr sz="800" b="0">
                 <a:solidFill>
-                  <a:srgbClr val="6C6A64"/>
+                  <a:srgbClr val="637797"/>
                 </a:solidFill>
                 <a:latin typeface="Pretendard"/>
                 <a:ea typeface="Pretendard"/>
@@ -30464,7 +30464,7 @@
             <a:r>
               <a:rPr sz="800" b="1">
                 <a:solidFill>
-                  <a:srgbClr val="141413"/>
+                  <a:srgbClr val="0F1F3A"/>
                 </a:solidFill>
                 <a:latin typeface="Pretendard"/>
                 <a:ea typeface="Pretendard"/>
@@ -30474,7 +30474,7 @@
             <a:r>
               <a:rPr sz="800" b="0">
                 <a:solidFill>
-                  <a:srgbClr val="6C6A64"/>
+                  <a:srgbClr val="637797"/>
                 </a:solidFill>
                 <a:latin typeface="Pretendard"/>
                 <a:ea typeface="Pretendard"/>
@@ -30514,7 +30514,7 @@
             <a:r>
               <a:rPr sz="800" b="1">
                 <a:solidFill>
-                  <a:srgbClr val="141413"/>
+                  <a:srgbClr val="0F1F3A"/>
                 </a:solidFill>
                 <a:latin typeface="Pretendard"/>
                 <a:ea typeface="Pretendard"/>
@@ -30524,7 +30524,7 @@
             <a:r>
               <a:rPr sz="800" b="0">
                 <a:solidFill>
-                  <a:srgbClr val="6C6A64"/>
+                  <a:srgbClr val="637797"/>
                 </a:solidFill>
                 <a:latin typeface="Pretendard"/>
                 <a:ea typeface="Pretendard"/>
@@ -30551,7 +30551,7 @@
             </a:avLst>
           </a:prstGeom>
           <a:solidFill>
-            <a:srgbClr val="181715"/>
+            <a:srgbClr val="091C4D"/>
           </a:solidFill>
           <a:ln>
             <a:noFill/>
@@ -30610,7 +30610,7 @@
             <a:r>
               <a:rPr sz="900" b="1">
                 <a:solidFill>
-                  <a:srgbClr val="E8A55A"/>
+                  <a:srgbClr val="1CA9D6"/>
                 </a:solidFill>
                 <a:latin typeface="Pretendard"/>
                 <a:ea typeface="Pretendard"/>
@@ -30620,7 +30620,7 @@
             <a:r>
               <a:rPr sz="900" b="0">
                 <a:solidFill>
-                  <a:srgbClr val="FAF9F5"/>
+                  <a:srgbClr val="EDF4FB"/>
                 </a:solidFill>
                 <a:latin typeface="Pretendard"/>
                 <a:ea typeface="Pretendard"/>
@@ -30660,7 +30660,7 @@
             <a:r>
               <a:rPr sz="800" b="0">
                 <a:solidFill>
-                  <a:srgbClr val="A09D96"/>
+                  <a:srgbClr val="9DB1CE"/>
                 </a:solidFill>
                 <a:latin typeface="Pretendard"/>
                 <a:ea typeface="Pretendard"/>
